--- a/DataForge-(SignalStream).pptx
+++ b/DataForge-(SignalStream).pptx
@@ -133,23 +133,31 @@
 </p:presentation>
 </file>
 
+<file path=ppt/revisionInfo.xml><?xml version="1.0" encoding="utf-8"?>
+<p1510:revInfo xmlns:a="http://schemas.openxmlformats.org/drawingml/2006/main" xmlns:r="http://schemas.openxmlformats.org/officeDocument/2006/relationships" xmlns:p1510="http://schemas.microsoft.com/office/powerpoint/2015/10/main">
+  <p1510:revLst>
+    <p1510:client id="{14A1D8B1-491A-4C08-93E8-8963BEF7EDFB}" v="26" dt="2025-11-08T05:38:32.471"/>
+  </p1510:revLst>
+</p1510:revInfo>
+</file>
+
 <file path=ppt/changesInfos/changesInfo1.xml><?xml version="1.0" encoding="utf-8"?>
 <pc:chgInfo xmlns:a="http://schemas.openxmlformats.org/drawingml/2006/main" xmlns:r="http://schemas.openxmlformats.org/officeDocument/2006/relationships" xmlns:ac="http://schemas.microsoft.com/office/drawing/2013/main/command" xmlns:pc="http://schemas.microsoft.com/office/powerpoint/2013/main/command">
   <pc:docChgLst>
     <pc:chgData name="Sahana J" userId="f4b95838ecef290e" providerId="LiveId" clId="{2C5FA4CF-9274-40E8-93DA-4F79EFBFAACA}"/>
-    <pc:docChg chg="modSld">
-      <pc:chgData name="Sahana J" userId="f4b95838ecef290e" providerId="LiveId" clId="{2C5FA4CF-9274-40E8-93DA-4F79EFBFAACA}" dt="2025-11-06T05:46:21.354" v="54" actId="20577"/>
+    <pc:docChg chg="undo custSel modSld">
+      <pc:chgData name="Sahana J" userId="f4b95838ecef290e" providerId="LiveId" clId="{2C5FA4CF-9274-40E8-93DA-4F79EFBFAACA}" dt="2025-11-08T05:45:35.740" v="681" actId="1440"/>
       <pc:docMkLst>
         <pc:docMk/>
       </pc:docMkLst>
       <pc:sldChg chg="modSp mod">
-        <pc:chgData name="Sahana J" userId="f4b95838ecef290e" providerId="LiveId" clId="{2C5FA4CF-9274-40E8-93DA-4F79EFBFAACA}" dt="2025-11-06T05:18:41.402" v="18" actId="20577"/>
+        <pc:chgData name="Sahana J" userId="f4b95838ecef290e" providerId="LiveId" clId="{2C5FA4CF-9274-40E8-93DA-4F79EFBFAACA}" dt="2025-11-07T08:28:55.331" v="65" actId="20577"/>
         <pc:sldMkLst>
           <pc:docMk/>
           <pc:sldMk cId="1637146212" sldId="256"/>
         </pc:sldMkLst>
         <pc:spChg chg="mod">
-          <ac:chgData name="Sahana J" userId="f4b95838ecef290e" providerId="LiveId" clId="{2C5FA4CF-9274-40E8-93DA-4F79EFBFAACA}" dt="2025-11-06T05:18:41.402" v="18" actId="20577"/>
+          <ac:chgData name="Sahana J" userId="f4b95838ecef290e" providerId="LiveId" clId="{2C5FA4CF-9274-40E8-93DA-4F79EFBFAACA}" dt="2025-11-07T08:28:55.331" v="65" actId="20577"/>
           <ac:spMkLst>
             <pc:docMk/>
             <pc:sldMk cId="1637146212" sldId="256"/>
@@ -158,11 +166,73 @@
         </pc:spChg>
       </pc:sldChg>
       <pc:sldChg chg="modSp mod">
-        <pc:chgData name="Sahana J" userId="f4b95838ecef290e" providerId="LiveId" clId="{2C5FA4CF-9274-40E8-93DA-4F79EFBFAACA}" dt="2025-11-05T07:09:33.375" v="0" actId="1038"/>
+        <pc:chgData name="Sahana J" userId="f4b95838ecef290e" providerId="LiveId" clId="{2C5FA4CF-9274-40E8-93DA-4F79EFBFAACA}" dt="2025-11-07T05:55:27.067" v="63"/>
+        <pc:sldMkLst>
+          <pc:docMk/>
+          <pc:sldMk cId="576150750" sldId="257"/>
+        </pc:sldMkLst>
+        <pc:spChg chg="mod">
+          <ac:chgData name="Sahana J" userId="f4b95838ecef290e" providerId="LiveId" clId="{2C5FA4CF-9274-40E8-93DA-4F79EFBFAACA}" dt="2025-11-07T05:55:27.067" v="63"/>
+          <ac:spMkLst>
+            <pc:docMk/>
+            <pc:sldMk cId="576150750" sldId="257"/>
+            <ac:spMk id="3" creationId="{20E1909F-10F6-BF5D-5104-203F79C5755D}"/>
+          </ac:spMkLst>
+        </pc:spChg>
+      </pc:sldChg>
+      <pc:sldChg chg="modNotesTx">
+        <pc:chgData name="Sahana J" userId="f4b95838ecef290e" providerId="LiveId" clId="{2C5FA4CF-9274-40E8-93DA-4F79EFBFAACA}" dt="2025-11-08T05:14:19.828" v="622" actId="20577"/>
+        <pc:sldMkLst>
+          <pc:docMk/>
+          <pc:sldMk cId="3216276847" sldId="260"/>
+        </pc:sldMkLst>
+      </pc:sldChg>
+      <pc:sldChg chg="addSp modSp mod">
+        <pc:chgData name="Sahana J" userId="f4b95838ecef290e" providerId="LiveId" clId="{2C5FA4CF-9274-40E8-93DA-4F79EFBFAACA}" dt="2025-11-07T11:24:07.477" v="363" actId="20577"/>
         <pc:sldMkLst>
           <pc:docMk/>
           <pc:sldMk cId="2692272064" sldId="261"/>
         </pc:sldMkLst>
+        <pc:spChg chg="mod">
+          <ac:chgData name="Sahana J" userId="f4b95838ecef290e" providerId="LiveId" clId="{2C5FA4CF-9274-40E8-93DA-4F79EFBFAACA}" dt="2025-11-07T11:24:07.477" v="363" actId="20577"/>
+          <ac:spMkLst>
+            <pc:docMk/>
+            <pc:sldMk cId="2692272064" sldId="261"/>
+            <ac:spMk id="2" creationId="{30615C13-C16B-BC33-C6AE-0E47749BD463}"/>
+          </ac:spMkLst>
+        </pc:spChg>
+        <pc:picChg chg="add mod">
+          <ac:chgData name="Sahana J" userId="f4b95838ecef290e" providerId="LiveId" clId="{2C5FA4CF-9274-40E8-93DA-4F79EFBFAACA}" dt="2025-11-07T11:22:16.430" v="93" actId="1035"/>
+          <ac:picMkLst>
+            <pc:docMk/>
+            <pc:sldMk cId="2692272064" sldId="261"/>
+            <ac:picMk id="4" creationId="{FB0E4384-977C-8E2E-54D2-39BE8BBB3F63}"/>
+          </ac:picMkLst>
+        </pc:picChg>
+        <pc:picChg chg="add mod">
+          <ac:chgData name="Sahana J" userId="f4b95838ecef290e" providerId="LiveId" clId="{2C5FA4CF-9274-40E8-93DA-4F79EFBFAACA}" dt="2025-11-07T11:23:01.380" v="229" actId="1037"/>
+          <ac:picMkLst>
+            <pc:docMk/>
+            <pc:sldMk cId="2692272064" sldId="261"/>
+            <ac:picMk id="6" creationId="{0EE77854-66FC-5474-22C0-EDC057EC1A30}"/>
+          </ac:picMkLst>
+        </pc:picChg>
+        <pc:picChg chg="add mod">
+          <ac:chgData name="Sahana J" userId="f4b95838ecef290e" providerId="LiveId" clId="{2C5FA4CF-9274-40E8-93DA-4F79EFBFAACA}" dt="2025-11-07T11:23:04.735" v="232" actId="1038"/>
+          <ac:picMkLst>
+            <pc:docMk/>
+            <pc:sldMk cId="2692272064" sldId="261"/>
+            <ac:picMk id="7" creationId="{F161E58F-409B-067A-89A0-A0595011277B}"/>
+          </ac:picMkLst>
+        </pc:picChg>
+        <pc:picChg chg="add mod">
+          <ac:chgData name="Sahana J" userId="f4b95838ecef290e" providerId="LiveId" clId="{2C5FA4CF-9274-40E8-93DA-4F79EFBFAACA}" dt="2025-11-07T11:23:34.207" v="347" actId="1037"/>
+          <ac:picMkLst>
+            <pc:docMk/>
+            <pc:sldMk cId="2692272064" sldId="261"/>
+            <ac:picMk id="8" creationId="{FADF7805-5BFE-22C6-A853-488A828C4B2F}"/>
+          </ac:picMkLst>
+        </pc:picChg>
         <pc:picChg chg="mod">
           <ac:chgData name="Sahana J" userId="f4b95838ecef290e" providerId="LiveId" clId="{2C5FA4CF-9274-40E8-93DA-4F79EFBFAACA}" dt="2025-11-05T07:09:33.375" v="0" actId="1038"/>
           <ac:picMkLst>
@@ -171,19 +241,72 @@
             <ac:picMk id="9" creationId="{491A21BF-DD3A-8099-DE14-168849DB97BE}"/>
           </ac:picMkLst>
         </pc:picChg>
+        <pc:picChg chg="add mod">
+          <ac:chgData name="Sahana J" userId="f4b95838ecef290e" providerId="LiveId" clId="{2C5FA4CF-9274-40E8-93DA-4F79EFBFAACA}" dt="2025-11-07T11:23:52.807" v="358" actId="1036"/>
+          <ac:picMkLst>
+            <pc:docMk/>
+            <pc:sldMk cId="2692272064" sldId="261"/>
+            <ac:picMk id="10" creationId="{C01DB29D-104D-3EC3-4E3A-4EB0B5D1910D}"/>
+          </ac:picMkLst>
+        </pc:picChg>
       </pc:sldChg>
-      <pc:sldChg chg="modSp mod">
-        <pc:chgData name="Sahana J" userId="f4b95838ecef290e" providerId="LiveId" clId="{2C5FA4CF-9274-40E8-93DA-4F79EFBFAACA}" dt="2025-11-06T05:46:21.354" v="54" actId="20577"/>
+      <pc:sldChg chg="modSp mod modNotesTx">
+        <pc:chgData name="Sahana J" userId="f4b95838ecef290e" providerId="LiveId" clId="{2C5FA4CF-9274-40E8-93DA-4F79EFBFAACA}" dt="2025-11-07T12:59:20.027" v="611" actId="20577"/>
+        <pc:sldMkLst>
+          <pc:docMk/>
+          <pc:sldMk cId="2286722330" sldId="266"/>
+        </pc:sldMkLst>
+        <pc:spChg chg="mod">
+          <ac:chgData name="Sahana J" userId="f4b95838ecef290e" providerId="LiveId" clId="{2C5FA4CF-9274-40E8-93DA-4F79EFBFAACA}" dt="2025-11-07T12:59:20.027" v="611" actId="20577"/>
+          <ac:spMkLst>
+            <pc:docMk/>
+            <pc:sldMk cId="2286722330" sldId="266"/>
+            <ac:spMk id="3" creationId="{20E1909F-10F6-BF5D-5104-203F79C5755D}"/>
+          </ac:spMkLst>
+        </pc:spChg>
+      </pc:sldChg>
+      <pc:sldChg chg="modSp mod modNotesTx">
+        <pc:chgData name="Sahana J" userId="f4b95838ecef290e" providerId="LiveId" clId="{2C5FA4CF-9274-40E8-93DA-4F79EFBFAACA}" dt="2025-11-07T13:00:32.343" v="619" actId="20577"/>
         <pc:sldMkLst>
           <pc:docMk/>
           <pc:sldMk cId="3600551870" sldId="268"/>
         </pc:sldMkLst>
         <pc:spChg chg="mod">
-          <ac:chgData name="Sahana J" userId="f4b95838ecef290e" providerId="LiveId" clId="{2C5FA4CF-9274-40E8-93DA-4F79EFBFAACA}" dt="2025-11-06T05:46:21.354" v="54" actId="20577"/>
+          <ac:chgData name="Sahana J" userId="f4b95838ecef290e" providerId="LiveId" clId="{2C5FA4CF-9274-40E8-93DA-4F79EFBFAACA}" dt="2025-11-07T13:00:32.343" v="619" actId="20577"/>
           <ac:spMkLst>
             <pc:docMk/>
             <pc:sldMk cId="3600551870" sldId="268"/>
             <ac:spMk id="3" creationId="{20E1909F-10F6-BF5D-5104-203F79C5755D}"/>
+          </ac:spMkLst>
+        </pc:spChg>
+      </pc:sldChg>
+      <pc:sldChg chg="modSp mod">
+        <pc:chgData name="Sahana J" userId="f4b95838ecef290e" providerId="LiveId" clId="{2C5FA4CF-9274-40E8-93DA-4F79EFBFAACA}" dt="2025-11-07T11:47:00.135" v="594" actId="20577"/>
+        <pc:sldMkLst>
+          <pc:docMk/>
+          <pc:sldMk cId="1896940940" sldId="269"/>
+        </pc:sldMkLst>
+        <pc:graphicFrameChg chg="mod modGraphic">
+          <ac:chgData name="Sahana J" userId="f4b95838ecef290e" providerId="LiveId" clId="{2C5FA4CF-9274-40E8-93DA-4F79EFBFAACA}" dt="2025-11-07T11:47:00.135" v="594" actId="20577"/>
+          <ac:graphicFrameMkLst>
+            <pc:docMk/>
+            <pc:sldMk cId="1896940940" sldId="269"/>
+            <ac:graphicFrameMk id="5" creationId="{4B7920EA-0CE3-18A6-2BF2-4B3B79090666}"/>
+          </ac:graphicFrameMkLst>
+        </pc:graphicFrameChg>
+      </pc:sldChg>
+      <pc:sldChg chg="modSp mod">
+        <pc:chgData name="Sahana J" userId="f4b95838ecef290e" providerId="LiveId" clId="{2C5FA4CF-9274-40E8-93DA-4F79EFBFAACA}" dt="2025-11-07T09:34:51.103" v="81" actId="5793"/>
+        <pc:sldMkLst>
+          <pc:docMk/>
+          <pc:sldMk cId="323554631" sldId="272"/>
+        </pc:sldMkLst>
+        <pc:spChg chg="mod">
+          <ac:chgData name="Sahana J" userId="f4b95838ecef290e" providerId="LiveId" clId="{2C5FA4CF-9274-40E8-93DA-4F79EFBFAACA}" dt="2025-11-07T09:34:51.103" v="81" actId="5793"/>
+          <ac:spMkLst>
+            <pc:docMk/>
+            <pc:sldMk cId="323554631" sldId="272"/>
+            <ac:spMk id="3" creationId="{19D49BD7-F02D-92AD-7ADB-21202A6D538F}"/>
           </ac:spMkLst>
         </pc:spChg>
       </pc:sldChg>
@@ -201,6 +324,234 @@
             <ac:spMk id="2" creationId="{BAD6A777-CD35-1F94-E64F-7E889407C2E6}"/>
           </ac:spMkLst>
         </pc:spChg>
+      </pc:sldChg>
+      <pc:sldChg chg="addSp delSp modSp mod">
+        <pc:chgData name="Sahana J" userId="f4b95838ecef290e" providerId="LiveId" clId="{2C5FA4CF-9274-40E8-93DA-4F79EFBFAACA}" dt="2025-11-08T05:42:59.230" v="659" actId="1440"/>
+        <pc:sldMkLst>
+          <pc:docMk/>
+          <pc:sldMk cId="2347034606" sldId="276"/>
+        </pc:sldMkLst>
+        <pc:spChg chg="add del mod">
+          <ac:chgData name="Sahana J" userId="f4b95838ecef290e" providerId="LiveId" clId="{2C5FA4CF-9274-40E8-93DA-4F79EFBFAACA}" dt="2025-11-08T05:39:02.866" v="642" actId="478"/>
+          <ac:spMkLst>
+            <pc:docMk/>
+            <pc:sldMk cId="2347034606" sldId="276"/>
+            <ac:spMk id="19" creationId="{282E03CD-AE86-D8C8-7603-AA172B05698A}"/>
+          </ac:spMkLst>
+        </pc:spChg>
+        <pc:picChg chg="add mod">
+          <ac:chgData name="Sahana J" userId="f4b95838ecef290e" providerId="LiveId" clId="{2C5FA4CF-9274-40E8-93DA-4F79EFBFAACA}" dt="2025-11-08T05:42:59.230" v="659" actId="1440"/>
+          <ac:picMkLst>
+            <pc:docMk/>
+            <pc:sldMk cId="2347034606" sldId="276"/>
+            <ac:picMk id="4" creationId="{2779ECFB-87EB-1684-CD5F-917B3C8D782E}"/>
+          </ac:picMkLst>
+        </pc:picChg>
+        <pc:picChg chg="del">
+          <ac:chgData name="Sahana J" userId="f4b95838ecef290e" providerId="LiveId" clId="{2C5FA4CF-9274-40E8-93DA-4F79EFBFAACA}" dt="2025-11-08T05:39:00.519" v="641" actId="478"/>
+          <ac:picMkLst>
+            <pc:docMk/>
+            <pc:sldMk cId="2347034606" sldId="276"/>
+            <ac:picMk id="5" creationId="{65EC3DD2-F8D5-A33C-E959-72D221DB7406}"/>
+          </ac:picMkLst>
+        </pc:picChg>
+        <pc:picChg chg="del">
+          <ac:chgData name="Sahana J" userId="f4b95838ecef290e" providerId="LiveId" clId="{2C5FA4CF-9274-40E8-93DA-4F79EFBFAACA}" dt="2025-11-08T05:38:31.901" v="636" actId="478"/>
+          <ac:picMkLst>
+            <pc:docMk/>
+            <pc:sldMk cId="2347034606" sldId="276"/>
+            <ac:picMk id="7" creationId="{047BFB48-9931-D621-AB98-DF9793A3E87C}"/>
+          </ac:picMkLst>
+        </pc:picChg>
+        <pc:picChg chg="del">
+          <ac:chgData name="Sahana J" userId="f4b95838ecef290e" providerId="LiveId" clId="{2C5FA4CF-9274-40E8-93DA-4F79EFBFAACA}" dt="2025-11-08T05:38:45.982" v="639" actId="478"/>
+          <ac:picMkLst>
+            <pc:docMk/>
+            <pc:sldMk cId="2347034606" sldId="276"/>
+            <ac:picMk id="8" creationId="{E2A39638-32A9-0361-55EA-3C6BE5548CCE}"/>
+          </ac:picMkLst>
+        </pc:picChg>
+        <pc:picChg chg="del">
+          <ac:chgData name="Sahana J" userId="f4b95838ecef290e" providerId="LiveId" clId="{2C5FA4CF-9274-40E8-93DA-4F79EFBFAACA}" dt="2025-11-08T05:38:45.982" v="639" actId="478"/>
+          <ac:picMkLst>
+            <pc:docMk/>
+            <pc:sldMk cId="2347034606" sldId="276"/>
+            <ac:picMk id="9" creationId="{66F32B51-975D-4A25-4AD4-91FB40BD1DBD}"/>
+          </ac:picMkLst>
+        </pc:picChg>
+        <pc:picChg chg="del">
+          <ac:chgData name="Sahana J" userId="f4b95838ecef290e" providerId="LiveId" clId="{2C5FA4CF-9274-40E8-93DA-4F79EFBFAACA}" dt="2025-11-08T05:38:45.982" v="639" actId="478"/>
+          <ac:picMkLst>
+            <pc:docMk/>
+            <pc:sldMk cId="2347034606" sldId="276"/>
+            <ac:picMk id="10" creationId="{F68D0794-E560-A53F-EF78-FA075227B7EC}"/>
+          </ac:picMkLst>
+        </pc:picChg>
+        <pc:picChg chg="del">
+          <ac:chgData name="Sahana J" userId="f4b95838ecef290e" providerId="LiveId" clId="{2C5FA4CF-9274-40E8-93DA-4F79EFBFAACA}" dt="2025-11-08T05:38:45.982" v="639" actId="478"/>
+          <ac:picMkLst>
+            <pc:docMk/>
+            <pc:sldMk cId="2347034606" sldId="276"/>
+            <ac:picMk id="11" creationId="{B9382989-7579-207E-CFFE-305313E48C1D}"/>
+          </ac:picMkLst>
+        </pc:picChg>
+        <pc:picChg chg="del">
+          <ac:chgData name="Sahana J" userId="f4b95838ecef290e" providerId="LiveId" clId="{2C5FA4CF-9274-40E8-93DA-4F79EFBFAACA}" dt="2025-11-08T05:38:45.982" v="639" actId="478"/>
+          <ac:picMkLst>
+            <pc:docMk/>
+            <pc:sldMk cId="2347034606" sldId="276"/>
+            <ac:picMk id="12" creationId="{4B135977-3465-99DC-1B8F-BE537C765073}"/>
+          </ac:picMkLst>
+        </pc:picChg>
+        <pc:picChg chg="del">
+          <ac:chgData name="Sahana J" userId="f4b95838ecef290e" providerId="LiveId" clId="{2C5FA4CF-9274-40E8-93DA-4F79EFBFAACA}" dt="2025-11-08T05:38:45.982" v="639" actId="478"/>
+          <ac:picMkLst>
+            <pc:docMk/>
+            <pc:sldMk cId="2347034606" sldId="276"/>
+            <ac:picMk id="13" creationId="{8E104611-7D7E-3CC3-7F61-D25D1D8AAB07}"/>
+          </ac:picMkLst>
+        </pc:picChg>
+        <pc:picChg chg="del">
+          <ac:chgData name="Sahana J" userId="f4b95838ecef290e" providerId="LiveId" clId="{2C5FA4CF-9274-40E8-93DA-4F79EFBFAACA}" dt="2025-11-08T05:38:45.982" v="639" actId="478"/>
+          <ac:picMkLst>
+            <pc:docMk/>
+            <pc:sldMk cId="2347034606" sldId="276"/>
+            <ac:picMk id="14" creationId="{B47A44D5-10E8-4660-919B-670B8A392253}"/>
+          </ac:picMkLst>
+        </pc:picChg>
+        <pc:picChg chg="del">
+          <ac:chgData name="Sahana J" userId="f4b95838ecef290e" providerId="LiveId" clId="{2C5FA4CF-9274-40E8-93DA-4F79EFBFAACA}" dt="2025-11-08T05:38:45.982" v="639" actId="478"/>
+          <ac:picMkLst>
+            <pc:docMk/>
+            <pc:sldMk cId="2347034606" sldId="276"/>
+            <ac:picMk id="15" creationId="{A5BCFB94-A579-FA3C-4839-0207F3A42B5A}"/>
+          </ac:picMkLst>
+        </pc:picChg>
+        <pc:picChg chg="del">
+          <ac:chgData name="Sahana J" userId="f4b95838ecef290e" providerId="LiveId" clId="{2C5FA4CF-9274-40E8-93DA-4F79EFBFAACA}" dt="2025-11-08T05:38:45.982" v="639" actId="478"/>
+          <ac:picMkLst>
+            <pc:docMk/>
+            <pc:sldMk cId="2347034606" sldId="276"/>
+            <ac:picMk id="16" creationId="{07A0F8C7-F474-8393-20B6-482A4FCAA842}"/>
+          </ac:picMkLst>
+        </pc:picChg>
+        <pc:picChg chg="del">
+          <ac:chgData name="Sahana J" userId="f4b95838ecef290e" providerId="LiveId" clId="{2C5FA4CF-9274-40E8-93DA-4F79EFBFAACA}" dt="2025-11-08T05:38:45.982" v="639" actId="478"/>
+          <ac:picMkLst>
+            <pc:docMk/>
+            <pc:sldMk cId="2347034606" sldId="276"/>
+            <ac:picMk id="17" creationId="{FDF91A9C-096E-AEEF-FB11-438CE143FCBA}"/>
+          </ac:picMkLst>
+        </pc:picChg>
+        <pc:picChg chg="add mod">
+          <ac:chgData name="Sahana J" userId="f4b95838ecef290e" providerId="LiveId" clId="{2C5FA4CF-9274-40E8-93DA-4F79EFBFAACA}" dt="2025-11-08T05:42:55.247" v="658" actId="1440"/>
+          <ac:picMkLst>
+            <pc:docMk/>
+            <pc:sldMk cId="2347034606" sldId="276"/>
+            <ac:picMk id="21" creationId="{16678153-7A3C-4D20-17DB-944F22A0CAD3}"/>
+          </ac:picMkLst>
+        </pc:picChg>
+      </pc:sldChg>
+      <pc:sldChg chg="modSp mod">
+        <pc:chgData name="Sahana J" userId="f4b95838ecef290e" providerId="LiveId" clId="{2C5FA4CF-9274-40E8-93DA-4F79EFBFAACA}" dt="2025-11-07T09:24:27.164" v="66" actId="2164"/>
+        <pc:sldMkLst>
+          <pc:docMk/>
+          <pc:sldMk cId="2978698901" sldId="277"/>
+        </pc:sldMkLst>
+        <pc:graphicFrameChg chg="modGraphic">
+          <ac:chgData name="Sahana J" userId="f4b95838ecef290e" providerId="LiveId" clId="{2C5FA4CF-9274-40E8-93DA-4F79EFBFAACA}" dt="2025-11-07T09:24:27.164" v="66" actId="2164"/>
+          <ac:graphicFrameMkLst>
+            <pc:docMk/>
+            <pc:sldMk cId="2978698901" sldId="277"/>
+            <ac:graphicFrameMk id="4" creationId="{980A16E8-D37E-357B-B6FE-FA45045C7ACA}"/>
+          </ac:graphicFrameMkLst>
+        </pc:graphicFrameChg>
+      </pc:sldChg>
+      <pc:sldChg chg="modSp mod">
+        <pc:chgData name="Sahana J" userId="f4b95838ecef290e" providerId="LiveId" clId="{2C5FA4CF-9274-40E8-93DA-4F79EFBFAACA}" dt="2025-11-08T05:45:35.740" v="681" actId="1440"/>
+        <pc:sldMkLst>
+          <pc:docMk/>
+          <pc:sldMk cId="1586730784" sldId="281"/>
+        </pc:sldMkLst>
+        <pc:picChg chg="mod">
+          <ac:chgData name="Sahana J" userId="f4b95838ecef290e" providerId="LiveId" clId="{2C5FA4CF-9274-40E8-93DA-4F79EFBFAACA}" dt="2025-11-08T05:45:35.740" v="681" actId="1440"/>
+          <ac:picMkLst>
+            <pc:docMk/>
+            <pc:sldMk cId="1586730784" sldId="281"/>
+            <ac:picMk id="5" creationId="{5AD37AA1-3102-D395-44B6-34BE9D676853}"/>
+          </ac:picMkLst>
+        </pc:picChg>
+      </pc:sldChg>
+      <pc:sldChg chg="addSp delSp modSp mod">
+        <pc:chgData name="Sahana J" userId="f4b95838ecef290e" providerId="LiveId" clId="{2C5FA4CF-9274-40E8-93DA-4F79EFBFAACA}" dt="2025-11-08T05:45:28.441" v="680" actId="1440"/>
+        <pc:sldMkLst>
+          <pc:docMk/>
+          <pc:sldMk cId="3563076512" sldId="286"/>
+        </pc:sldMkLst>
+        <pc:spChg chg="add del mod">
+          <ac:chgData name="Sahana J" userId="f4b95838ecef290e" providerId="LiveId" clId="{2C5FA4CF-9274-40E8-93DA-4F79EFBFAACA}" dt="2025-11-08T05:38:08.967" v="631" actId="478"/>
+          <ac:spMkLst>
+            <pc:docMk/>
+            <pc:sldMk cId="3563076512" sldId="286"/>
+            <ac:spMk id="11" creationId="{FF1A995E-BD05-9FD6-405A-01A85ABE302F}"/>
+          </ac:spMkLst>
+        </pc:spChg>
+        <pc:picChg chg="add del">
+          <ac:chgData name="Sahana J" userId="f4b95838ecef290e" providerId="LiveId" clId="{2C5FA4CF-9274-40E8-93DA-4F79EFBFAACA}" dt="2025-11-08T05:37:49.386" v="624" actId="22"/>
+          <ac:picMkLst>
+            <pc:docMk/>
+            <pc:sldMk cId="3563076512" sldId="286"/>
+            <ac:picMk id="5" creationId="{0A0E81EE-C861-F197-8803-F73A06BF28C8}"/>
+          </ac:picMkLst>
+        </pc:picChg>
+        <pc:picChg chg="del">
+          <ac:chgData name="Sahana J" userId="f4b95838ecef290e" providerId="LiveId" clId="{2C5FA4CF-9274-40E8-93DA-4F79EFBFAACA}" dt="2025-11-08T05:37:50.490" v="625" actId="478"/>
+          <ac:picMkLst>
+            <pc:docMk/>
+            <pc:sldMk cId="3563076512" sldId="286"/>
+            <ac:picMk id="9" creationId="{45BE9DB0-56EB-F8DD-2A68-35B84D8F5248}"/>
+          </ac:picMkLst>
+        </pc:picChg>
+        <pc:picChg chg="del">
+          <ac:chgData name="Sahana J" userId="f4b95838ecef290e" providerId="LiveId" clId="{2C5FA4CF-9274-40E8-93DA-4F79EFBFAACA}" dt="2025-11-08T05:38:19.812" v="634" actId="478"/>
+          <ac:picMkLst>
+            <pc:docMk/>
+            <pc:sldMk cId="3563076512" sldId="286"/>
+            <ac:picMk id="10" creationId="{9E3FE195-6246-1CE0-51CD-0C200AE346EE}"/>
+          </ac:picMkLst>
+        </pc:picChg>
+        <pc:picChg chg="add del mod">
+          <ac:chgData name="Sahana J" userId="f4b95838ecef290e" providerId="LiveId" clId="{2C5FA4CF-9274-40E8-93DA-4F79EFBFAACA}" dt="2025-11-08T05:38:23.319" v="635" actId="21"/>
+          <ac:picMkLst>
+            <pc:docMk/>
+            <pc:sldMk cId="3563076512" sldId="286"/>
+            <ac:picMk id="13" creationId="{2779ECFB-87EB-1684-CD5F-917B3C8D782E}"/>
+          </ac:picMkLst>
+        </pc:picChg>
+        <pc:picChg chg="add mod">
+          <ac:chgData name="Sahana J" userId="f4b95838ecef290e" providerId="LiveId" clId="{2C5FA4CF-9274-40E8-93DA-4F79EFBFAACA}" dt="2025-11-08T05:43:09.938" v="661" actId="14100"/>
+          <ac:picMkLst>
+            <pc:docMk/>
+            <pc:sldMk cId="3563076512" sldId="286"/>
+            <ac:picMk id="15" creationId="{E7D25687-8183-C3D5-2650-CD533338DAA5}"/>
+          </ac:picMkLst>
+        </pc:picChg>
+        <pc:picChg chg="add del mod modCrop">
+          <ac:chgData name="Sahana J" userId="f4b95838ecef290e" providerId="LiveId" clId="{2C5FA4CF-9274-40E8-93DA-4F79EFBFAACA}" dt="2025-11-08T05:44:17.333" v="672" actId="478"/>
+          <ac:picMkLst>
+            <pc:docMk/>
+            <pc:sldMk cId="3563076512" sldId="286"/>
+            <ac:picMk id="17" creationId="{8D31977E-4400-19CD-7B0D-E9FB10D6BDEB}"/>
+          </ac:picMkLst>
+        </pc:picChg>
+        <pc:picChg chg="add mod">
+          <ac:chgData name="Sahana J" userId="f4b95838ecef290e" providerId="LiveId" clId="{2C5FA4CF-9274-40E8-93DA-4F79EFBFAACA}" dt="2025-11-08T05:45:28.441" v="680" actId="1440"/>
+          <ac:picMkLst>
+            <pc:docMk/>
+            <pc:sldMk cId="3563076512" sldId="286"/>
+            <ac:picMk id="19" creationId="{CC4ABAD3-ECD5-05FD-6202-4996D87E4C46}"/>
+          </ac:picMkLst>
+        </pc:picChg>
       </pc:sldChg>
     </pc:docChg>
   </pc:docChgLst>
@@ -981,7 +1332,7 @@
             </a:lnSpc>
           </a:pPr>
           <a:r>
-            <a:rPr lang="en-US"/>
+            <a:rPr lang="en-US" dirty="0"/>
             <a:t>Real-Time Analytics Dashboard</a:t>
           </a:r>
         </a:p>
@@ -1022,8 +1373,24 @@
             </a:lnSpc>
           </a:pPr>
           <a:r>
-            <a:rPr lang="en-US"/>
-            <a:t>Integrate with Amazon QuickSight or Grafana for live visualization of streaming data.</a:t>
+            <a:rPr lang="en-US" dirty="0"/>
+            <a:t>Integrate with Amazon </a:t>
+          </a:r>
+          <a:r>
+            <a:rPr lang="en-US" dirty="0" err="1"/>
+            <a:t>QuickSight</a:t>
+          </a:r>
+          <a:r>
+            <a:rPr lang="en-US" dirty="0"/>
+            <a:t> or </a:t>
+          </a:r>
+          <a:r>
+            <a:rPr lang="en-US" dirty="0" err="1"/>
+            <a:t>Streamlit</a:t>
+          </a:r>
+          <a:r>
+            <a:rPr lang="en-US" dirty="0"/>
+            <a:t> for live visualization of streaming data.</a:t>
           </a:r>
         </a:p>
       </dgm:t>
@@ -1063,8 +1430,8 @@
             </a:lnSpc>
           </a:pPr>
           <a:r>
-            <a:rPr lang="en-US"/>
-            <a:t>Data Quality &amp; Validation Layer</a:t>
+            <a:rPr lang="en-US" dirty="0"/>
+            <a:t>Data Storage Format</a:t>
           </a:r>
         </a:p>
       </dgm:t>
@@ -1104,8 +1471,8 @@
             </a:lnSpc>
           </a:pPr>
           <a:r>
-            <a:rPr lang="en-US"/>
-            <a:t>Add AWS Lambda or Glue triggers to validate and cleanse data before storage.</a:t>
+            <a:rPr lang="en-US" dirty="0"/>
+            <a:t>Storing data in parquet format for better performance</a:t>
           </a:r>
         </a:p>
       </dgm:t>
@@ -1132,88 +1499,6 @@
         </a:p>
       </dgm:t>
     </dgm:pt>
-    <dgm:pt modelId="{5D60B4A0-D381-446C-A827-117C8A5324FF}">
-      <dgm:prSet/>
-      <dgm:spPr/>
-      <dgm:t>
-        <a:bodyPr/>
-        <a:lstStyle/>
-        <a:p>
-          <a:pPr>
-            <a:lnSpc>
-              <a:spcPct val="100000"/>
-            </a:lnSpc>
-          </a:pPr>
-          <a:r>
-            <a:rPr lang="en-US"/>
-            <a:t>Scalable Multi-Stream Integration</a:t>
-          </a:r>
-        </a:p>
-      </dgm:t>
-    </dgm:pt>
-    <dgm:pt modelId="{D02EE5CB-E74B-4D03-81A1-98A56D198777}" type="parTrans" cxnId="{6FBA292E-B45C-4326-B1F5-BD076C039F1E}">
-      <dgm:prSet/>
-      <dgm:spPr/>
-      <dgm:t>
-        <a:bodyPr/>
-        <a:lstStyle/>
-        <a:p>
-          <a:endParaRPr lang="en-US"/>
-        </a:p>
-      </dgm:t>
-    </dgm:pt>
-    <dgm:pt modelId="{BFAA7B3F-565B-4F44-9914-DB2741D0385B}" type="sibTrans" cxnId="{6FBA292E-B45C-4326-B1F5-BD076C039F1E}">
-      <dgm:prSet/>
-      <dgm:spPr/>
-      <dgm:t>
-        <a:bodyPr/>
-        <a:lstStyle/>
-        <a:p>
-          <a:endParaRPr lang="en-US"/>
-        </a:p>
-      </dgm:t>
-    </dgm:pt>
-    <dgm:pt modelId="{6EA0F777-8F4E-4E58-9D01-E0CEEB10C7D8}">
-      <dgm:prSet/>
-      <dgm:spPr/>
-      <dgm:t>
-        <a:bodyPr/>
-        <a:lstStyle/>
-        <a:p>
-          <a:pPr>
-            <a:lnSpc>
-              <a:spcPct val="100000"/>
-            </a:lnSpc>
-          </a:pPr>
-          <a:r>
-            <a:rPr lang="en-US"/>
-            <a:t>Extend the pipeline to handle multiple Kinesis streams for different data sources or applications.</a:t>
-          </a:r>
-        </a:p>
-      </dgm:t>
-    </dgm:pt>
-    <dgm:pt modelId="{C5A5FC7A-C30C-4FDA-8E1C-8A37CCF37954}" type="parTrans" cxnId="{677D5BD8-DE50-44F9-8377-47238E760863}">
-      <dgm:prSet/>
-      <dgm:spPr/>
-      <dgm:t>
-        <a:bodyPr/>
-        <a:lstStyle/>
-        <a:p>
-          <a:endParaRPr lang="en-US"/>
-        </a:p>
-      </dgm:t>
-    </dgm:pt>
-    <dgm:pt modelId="{5948E49C-37FB-4E2E-9DCD-B0DC2878AF13}" type="sibTrans" cxnId="{677D5BD8-DE50-44F9-8377-47238E760863}">
-      <dgm:prSet/>
-      <dgm:spPr/>
-      <dgm:t>
-        <a:bodyPr/>
-        <a:lstStyle/>
-        <a:p>
-          <a:endParaRPr lang="en-US"/>
-        </a:p>
-      </dgm:t>
-    </dgm:pt>
     <dgm:pt modelId="{313A786B-827A-4104-8755-896AD4ECED5A}" type="pres">
       <dgm:prSet presAssocID="{08BEB6A6-727D-4ED1-90DF-6BB9352193D0}" presName="root" presStyleCnt="0">
         <dgm:presLayoutVars>
@@ -1228,11 +1513,11 @@
       <dgm:spPr/>
     </dgm:pt>
     <dgm:pt modelId="{C4FF63E9-5F1F-4FAB-9A7A-6C42E18AC262}" type="pres">
-      <dgm:prSet presAssocID="{933B8F59-8782-4FB4-BFF7-D76362120757}" presName="bgRect" presStyleLbl="bgShp" presStyleIdx="0" presStyleCnt="3"/>
+      <dgm:prSet presAssocID="{933B8F59-8782-4FB4-BFF7-D76362120757}" presName="bgRect" presStyleLbl="bgShp" presStyleIdx="0" presStyleCnt="2"/>
       <dgm:spPr/>
     </dgm:pt>
     <dgm:pt modelId="{95D8A666-C23B-4F7B-A08C-DF6FF04EAC39}" type="pres">
-      <dgm:prSet presAssocID="{933B8F59-8782-4FB4-BFF7-D76362120757}" presName="iconRect" presStyleLbl="node1" presStyleIdx="0" presStyleCnt="3"/>
+      <dgm:prSet presAssocID="{933B8F59-8782-4FB4-BFF7-D76362120757}" presName="iconRect" presStyleLbl="node1" presStyleIdx="0" presStyleCnt="2"/>
       <dgm:spPr>
         <a:blipFill>
           <a:blip xmlns:r="http://schemas.openxmlformats.org/officeDocument/2006/relationships" r:embed="rId1">
@@ -1261,7 +1546,7 @@
       <dgm:spPr/>
     </dgm:pt>
     <dgm:pt modelId="{803F1622-BD80-4AD4-B0F3-F68EF1942DF4}" type="pres">
-      <dgm:prSet presAssocID="{933B8F59-8782-4FB4-BFF7-D76362120757}" presName="parTx" presStyleLbl="revTx" presStyleIdx="0" presStyleCnt="6">
+      <dgm:prSet presAssocID="{933B8F59-8782-4FB4-BFF7-D76362120757}" presName="parTx" presStyleLbl="revTx" presStyleIdx="0" presStyleCnt="4">
         <dgm:presLayoutVars>
           <dgm:chMax val="0"/>
           <dgm:chPref val="0"/>
@@ -1270,7 +1555,7 @@
       <dgm:spPr/>
     </dgm:pt>
     <dgm:pt modelId="{9F005783-6DD3-46AE-B883-F7C94ABD5FD8}" type="pres">
-      <dgm:prSet presAssocID="{933B8F59-8782-4FB4-BFF7-D76362120757}" presName="desTx" presStyleLbl="revTx" presStyleIdx="1" presStyleCnt="6">
+      <dgm:prSet presAssocID="{933B8F59-8782-4FB4-BFF7-D76362120757}" presName="desTx" presStyleLbl="revTx" presStyleIdx="1" presStyleCnt="4">
         <dgm:presLayoutVars/>
       </dgm:prSet>
       <dgm:spPr/>
@@ -1284,11 +1569,11 @@
       <dgm:spPr/>
     </dgm:pt>
     <dgm:pt modelId="{6B71FFC4-CE36-4402-A5ED-BCA0DFDE9DD6}" type="pres">
-      <dgm:prSet presAssocID="{60185A80-1092-431F-8D9E-0798FFF4488C}" presName="bgRect" presStyleLbl="bgShp" presStyleIdx="1" presStyleCnt="3"/>
+      <dgm:prSet presAssocID="{60185A80-1092-431F-8D9E-0798FFF4488C}" presName="bgRect" presStyleLbl="bgShp" presStyleIdx="1" presStyleCnt="2"/>
       <dgm:spPr/>
     </dgm:pt>
     <dgm:pt modelId="{6B764724-530D-4D2B-8463-56E26C35CC87}" type="pres">
-      <dgm:prSet presAssocID="{60185A80-1092-431F-8D9E-0798FFF4488C}" presName="iconRect" presStyleLbl="node1" presStyleIdx="1" presStyleCnt="3"/>
+      <dgm:prSet presAssocID="{60185A80-1092-431F-8D9E-0798FFF4488C}" presName="iconRect" presStyleLbl="node1" presStyleIdx="1" presStyleCnt="2"/>
       <dgm:spPr>
         <a:blipFill>
           <a:blip xmlns:r="http://schemas.openxmlformats.org/officeDocument/2006/relationships" r:embed="rId3">
@@ -1317,7 +1602,7 @@
       <dgm:spPr/>
     </dgm:pt>
     <dgm:pt modelId="{EE1031B8-823A-4B9A-B77B-9BE9A00D4EBC}" type="pres">
-      <dgm:prSet presAssocID="{60185A80-1092-431F-8D9E-0798FFF4488C}" presName="parTx" presStyleLbl="revTx" presStyleIdx="2" presStyleCnt="6">
+      <dgm:prSet presAssocID="{60185A80-1092-431F-8D9E-0798FFF4488C}" presName="parTx" presStyleLbl="revTx" presStyleIdx="2" presStyleCnt="4">
         <dgm:presLayoutVars>
           <dgm:chMax val="0"/>
           <dgm:chPref val="0"/>
@@ -1326,63 +1611,7 @@
       <dgm:spPr/>
     </dgm:pt>
     <dgm:pt modelId="{21F28D03-155A-4071-9D67-5C47B793C9F4}" type="pres">
-      <dgm:prSet presAssocID="{60185A80-1092-431F-8D9E-0798FFF4488C}" presName="desTx" presStyleLbl="revTx" presStyleIdx="3" presStyleCnt="6">
-        <dgm:presLayoutVars/>
-      </dgm:prSet>
-      <dgm:spPr/>
-    </dgm:pt>
-    <dgm:pt modelId="{21B53566-331F-4C04-975D-60222F312368}" type="pres">
-      <dgm:prSet presAssocID="{D2225306-CCCA-4C4D-B19B-9E0A42C88DD2}" presName="sibTrans" presStyleCnt="0"/>
-      <dgm:spPr/>
-    </dgm:pt>
-    <dgm:pt modelId="{DDDB6F32-820A-4307-8BF3-7E467F913DA2}" type="pres">
-      <dgm:prSet presAssocID="{5D60B4A0-D381-446C-A827-117C8A5324FF}" presName="compNode" presStyleCnt="0"/>
-      <dgm:spPr/>
-    </dgm:pt>
-    <dgm:pt modelId="{2AAA2690-4507-4EA5-B927-A87C17036440}" type="pres">
-      <dgm:prSet presAssocID="{5D60B4A0-D381-446C-A827-117C8A5324FF}" presName="bgRect" presStyleLbl="bgShp" presStyleIdx="2" presStyleCnt="3"/>
-      <dgm:spPr/>
-    </dgm:pt>
-    <dgm:pt modelId="{44244ED6-3982-4A4D-BA06-0F61B295B612}" type="pres">
-      <dgm:prSet presAssocID="{5D60B4A0-D381-446C-A827-117C8A5324FF}" presName="iconRect" presStyleLbl="node1" presStyleIdx="2" presStyleCnt="3"/>
-      <dgm:spPr>
-        <a:blipFill>
-          <a:blip xmlns:r="http://schemas.openxmlformats.org/officeDocument/2006/relationships" r:embed="rId5">
-            <a:extLst>
-              <a:ext uri="{28A0092B-C50C-407E-A947-70E740481C1C}">
-                <a14:useLocalDpi xmlns:a14="http://schemas.microsoft.com/office/drawing/2010/main" val="0"/>
-              </a:ext>
-              <a:ext uri="{96DAC541-7B7A-43D3-8B79-37D633B846F1}">
-                <asvg:svgBlip xmlns:asvg="http://schemas.microsoft.com/office/drawing/2016/SVG/main" r:embed="rId6"/>
-              </a:ext>
-            </a:extLst>
-          </a:blip>
-          <a:stretch>
-            <a:fillRect/>
-          </a:stretch>
-        </a:blipFill>
-      </dgm:spPr>
-      <dgm:extLst>
-        <a:ext uri="{E40237B7-FDA0-4F09-8148-C483321AD2D9}">
-          <dgm14:cNvPr xmlns:dgm14="http://schemas.microsoft.com/office/drawing/2010/diagram" id="0" name="" descr="Server"/>
-        </a:ext>
-      </dgm:extLst>
-    </dgm:pt>
-    <dgm:pt modelId="{4A820A93-9C57-4155-B082-275128D9E7D0}" type="pres">
-      <dgm:prSet presAssocID="{5D60B4A0-D381-446C-A827-117C8A5324FF}" presName="spaceRect" presStyleCnt="0"/>
-      <dgm:spPr/>
-    </dgm:pt>
-    <dgm:pt modelId="{00188DA9-03B3-49F9-A18A-BA6D97A9B477}" type="pres">
-      <dgm:prSet presAssocID="{5D60B4A0-D381-446C-A827-117C8A5324FF}" presName="parTx" presStyleLbl="revTx" presStyleIdx="4" presStyleCnt="6">
-        <dgm:presLayoutVars>
-          <dgm:chMax val="0"/>
-          <dgm:chPref val="0"/>
-        </dgm:presLayoutVars>
-      </dgm:prSet>
-      <dgm:spPr/>
-    </dgm:pt>
-    <dgm:pt modelId="{117A92CF-0D0C-44D9-B3E1-C1C9F8F54276}" type="pres">
-      <dgm:prSet presAssocID="{5D60B4A0-D381-446C-A827-117C8A5324FF}" presName="desTx" presStyleLbl="revTx" presStyleIdx="5" presStyleCnt="6">
+      <dgm:prSet presAssocID="{60185A80-1092-431F-8D9E-0798FFF4488C}" presName="desTx" presStyleLbl="revTx" presStyleIdx="3" presStyleCnt="4">
         <dgm:presLayoutVars/>
       </dgm:prSet>
       <dgm:spPr/>
@@ -1391,15 +1620,11 @@
   <dgm:cxnLst>
     <dgm:cxn modelId="{7E064A0B-A579-4C5F-895B-0F9A443ABB3B}" srcId="{08BEB6A6-727D-4ED1-90DF-6BB9352193D0}" destId="{933B8F59-8782-4FB4-BFF7-D76362120757}" srcOrd="0" destOrd="0" parTransId="{D0517087-D0DE-4207-8FAD-66E8836138B8}" sibTransId="{6E066054-BEAB-4BDC-A582-A0E0E34D4D54}"/>
     <dgm:cxn modelId="{06346720-FF34-414B-81C0-16ED0196B938}" type="presOf" srcId="{52FB958B-8448-49AB-ACBB-330D56FCFE6B}" destId="{21F28D03-155A-4071-9D67-5C47B793C9F4}" srcOrd="0" destOrd="0" presId="urn:microsoft.com/office/officeart/2018/2/layout/IconVerticalSolidList"/>
-    <dgm:cxn modelId="{6FBA292E-B45C-4326-B1F5-BD076C039F1E}" srcId="{08BEB6A6-727D-4ED1-90DF-6BB9352193D0}" destId="{5D60B4A0-D381-446C-A827-117C8A5324FF}" srcOrd="2" destOrd="0" parTransId="{D02EE5CB-E74B-4D03-81A1-98A56D198777}" sibTransId="{BFAA7B3F-565B-4F44-9914-DB2741D0385B}"/>
     <dgm:cxn modelId="{EE98CF66-7984-428F-A985-B4F7178D182B}" type="presOf" srcId="{403BF13F-6FC5-4FD5-863F-6ECD7E32F200}" destId="{9F005783-6DD3-46AE-B883-F7C94ABD5FD8}" srcOrd="0" destOrd="0" presId="urn:microsoft.com/office/officeart/2018/2/layout/IconVerticalSolidList"/>
     <dgm:cxn modelId="{3B90B450-E20B-4940-AA9A-C0EA516B7540}" type="presOf" srcId="{60185A80-1092-431F-8D9E-0798FFF4488C}" destId="{EE1031B8-823A-4B9A-B77B-9BE9A00D4EBC}" srcOrd="0" destOrd="0" presId="urn:microsoft.com/office/officeart/2018/2/layout/IconVerticalSolidList"/>
     <dgm:cxn modelId="{92732FA9-5802-4FF6-829E-901BF4D799AE}" srcId="{933B8F59-8782-4FB4-BFF7-D76362120757}" destId="{403BF13F-6FC5-4FD5-863F-6ECD7E32F200}" srcOrd="0" destOrd="0" parTransId="{BFF4D87E-9DDD-45DC-B2B2-39D9A6BA01FF}" sibTransId="{832D82C7-F64D-4C8D-8AB3-FFE1E2ACF376}"/>
     <dgm:cxn modelId="{1CD39BBA-FE48-4A7D-8318-E3F36464E49A}" type="presOf" srcId="{08BEB6A6-727D-4ED1-90DF-6BB9352193D0}" destId="{313A786B-827A-4104-8755-896AD4ECED5A}" srcOrd="0" destOrd="0" presId="urn:microsoft.com/office/officeart/2018/2/layout/IconVerticalSolidList"/>
-    <dgm:cxn modelId="{EDBB39C4-CC96-41AE-9D31-EE76C27EFC24}" type="presOf" srcId="{6EA0F777-8F4E-4E58-9D01-E0CEEB10C7D8}" destId="{117A92CF-0D0C-44D9-B3E1-C1C9F8F54276}" srcOrd="0" destOrd="0" presId="urn:microsoft.com/office/officeart/2018/2/layout/IconVerticalSolidList"/>
     <dgm:cxn modelId="{651474C6-3CAC-467A-873C-BE7790EC37AF}" type="presOf" srcId="{933B8F59-8782-4FB4-BFF7-D76362120757}" destId="{803F1622-BD80-4AD4-B0F3-F68EF1942DF4}" srcOrd="0" destOrd="0" presId="urn:microsoft.com/office/officeart/2018/2/layout/IconVerticalSolidList"/>
-    <dgm:cxn modelId="{F9A6F9D2-C0D6-445A-BE67-2936E0F5E0CF}" type="presOf" srcId="{5D60B4A0-D381-446C-A827-117C8A5324FF}" destId="{00188DA9-03B3-49F9-A18A-BA6D97A9B477}" srcOrd="0" destOrd="0" presId="urn:microsoft.com/office/officeart/2018/2/layout/IconVerticalSolidList"/>
-    <dgm:cxn modelId="{677D5BD8-DE50-44F9-8377-47238E760863}" srcId="{5D60B4A0-D381-446C-A827-117C8A5324FF}" destId="{6EA0F777-8F4E-4E58-9D01-E0CEEB10C7D8}" srcOrd="0" destOrd="0" parTransId="{C5A5FC7A-C30C-4FDA-8E1C-8A37CCF37954}" sibTransId="{5948E49C-37FB-4E2E-9DCD-B0DC2878AF13}"/>
     <dgm:cxn modelId="{40849BD8-F2A4-4B86-887F-5E0ED4121391}" srcId="{08BEB6A6-727D-4ED1-90DF-6BB9352193D0}" destId="{60185A80-1092-431F-8D9E-0798FFF4488C}" srcOrd="1" destOrd="0" parTransId="{07E4088D-26B5-4BCE-B782-9D0CB8BA4959}" sibTransId="{D2225306-CCCA-4C4D-B19B-9E0A42C88DD2}"/>
     <dgm:cxn modelId="{844DE9FE-2E77-4276-A794-8CE4D238D1F9}" srcId="{60185A80-1092-431F-8D9E-0798FFF4488C}" destId="{52FB958B-8448-49AB-ACBB-330D56FCFE6B}" srcOrd="0" destOrd="0" parTransId="{1C8D3003-E1A6-4AFC-889F-9221EE45B6C6}" sibTransId="{7B25F95F-7A90-49BE-AACC-91BEDD795BE1}"/>
     <dgm:cxn modelId="{BE335CF3-3D96-4AE8-B85D-D80E0D41D887}" type="presParOf" srcId="{313A786B-827A-4104-8755-896AD4ECED5A}" destId="{4982CD7F-4CE3-4F55-BE10-5C1B166A215C}" srcOrd="0" destOrd="0" presId="urn:microsoft.com/office/officeart/2018/2/layout/IconVerticalSolidList"/>
@@ -1415,13 +1640,6 @@
     <dgm:cxn modelId="{6AF7106E-3FFC-430C-811A-ABCF72599C69}" type="presParOf" srcId="{3D1E7F56-69D3-476E-89EA-72D44C1B0365}" destId="{3FE9F861-22DE-48AA-8B7F-8799C9EB5FEA}" srcOrd="2" destOrd="0" presId="urn:microsoft.com/office/officeart/2018/2/layout/IconVerticalSolidList"/>
     <dgm:cxn modelId="{E5D613A9-8AEC-40C3-8517-BC4A71CBD2B2}" type="presParOf" srcId="{3D1E7F56-69D3-476E-89EA-72D44C1B0365}" destId="{EE1031B8-823A-4B9A-B77B-9BE9A00D4EBC}" srcOrd="3" destOrd="0" presId="urn:microsoft.com/office/officeart/2018/2/layout/IconVerticalSolidList"/>
     <dgm:cxn modelId="{8FA5AFAC-8A50-43CE-94D1-EFDA4D5BBFE3}" type="presParOf" srcId="{3D1E7F56-69D3-476E-89EA-72D44C1B0365}" destId="{21F28D03-155A-4071-9D67-5C47B793C9F4}" srcOrd="4" destOrd="0" presId="urn:microsoft.com/office/officeart/2018/2/layout/IconVerticalSolidList"/>
-    <dgm:cxn modelId="{2655436D-EEBD-42C3-BC6B-E1EDC66040A1}" type="presParOf" srcId="{313A786B-827A-4104-8755-896AD4ECED5A}" destId="{21B53566-331F-4C04-975D-60222F312368}" srcOrd="3" destOrd="0" presId="urn:microsoft.com/office/officeart/2018/2/layout/IconVerticalSolidList"/>
-    <dgm:cxn modelId="{FC8A7A3B-5C0B-44AB-AF57-A4C850381876}" type="presParOf" srcId="{313A786B-827A-4104-8755-896AD4ECED5A}" destId="{DDDB6F32-820A-4307-8BF3-7E467F913DA2}" srcOrd="4" destOrd="0" presId="urn:microsoft.com/office/officeart/2018/2/layout/IconVerticalSolidList"/>
-    <dgm:cxn modelId="{5BF20302-CF5F-4DFF-B131-A2FB6CD00A4E}" type="presParOf" srcId="{DDDB6F32-820A-4307-8BF3-7E467F913DA2}" destId="{2AAA2690-4507-4EA5-B927-A87C17036440}" srcOrd="0" destOrd="0" presId="urn:microsoft.com/office/officeart/2018/2/layout/IconVerticalSolidList"/>
-    <dgm:cxn modelId="{FE351213-B073-4420-8684-D93B01804EB7}" type="presParOf" srcId="{DDDB6F32-820A-4307-8BF3-7E467F913DA2}" destId="{44244ED6-3982-4A4D-BA06-0F61B295B612}" srcOrd="1" destOrd="0" presId="urn:microsoft.com/office/officeart/2018/2/layout/IconVerticalSolidList"/>
-    <dgm:cxn modelId="{A0A8285A-5E5D-438D-A156-36757AAFF4E1}" type="presParOf" srcId="{DDDB6F32-820A-4307-8BF3-7E467F913DA2}" destId="{4A820A93-9C57-4155-B082-275128D9E7D0}" srcOrd="2" destOrd="0" presId="urn:microsoft.com/office/officeart/2018/2/layout/IconVerticalSolidList"/>
-    <dgm:cxn modelId="{A44D20F7-85A4-4A91-A752-28212D029D9A}" type="presParOf" srcId="{DDDB6F32-820A-4307-8BF3-7E467F913DA2}" destId="{00188DA9-03B3-49F9-A18A-BA6D97A9B477}" srcOrd="3" destOrd="0" presId="urn:microsoft.com/office/officeart/2018/2/layout/IconVerticalSolidList"/>
-    <dgm:cxn modelId="{1EE150D2-23EA-4B94-8ACF-8B5650A0FDED}" type="presParOf" srcId="{DDDB6F32-820A-4307-8BF3-7E467F913DA2}" destId="{117A92CF-0D0C-44D9-B3E1-C1C9F8F54276}" srcOrd="4" destOrd="0" presId="urn:microsoft.com/office/officeart/2018/2/layout/IconVerticalSolidList"/>
   </dgm:cxnLst>
   <dgm:bg/>
   <dgm:whole/>
@@ -1448,8 +1666,8 @@
       </dsp:nvSpPr>
       <dsp:spPr>
         <a:xfrm>
-          <a:off x="0" y="531"/>
-          <a:ext cx="10515600" cy="1242935"/>
+          <a:off x="0" y="707092"/>
+          <a:ext cx="10515600" cy="1305401"/>
         </a:xfrm>
         <a:prstGeom prst="roundRect">
           <a:avLst>
@@ -1490,8 +1708,8 @@
       </dsp:nvSpPr>
       <dsp:spPr>
         <a:xfrm>
-          <a:off x="375988" y="280191"/>
-          <a:ext cx="683614" cy="683614"/>
+          <a:off x="394883" y="1000807"/>
+          <a:ext cx="717970" cy="717970"/>
         </a:xfrm>
         <a:prstGeom prst="rect">
           <a:avLst/>
@@ -1547,8 +1765,8 @@
       </dsp:nvSpPr>
       <dsp:spPr>
         <a:xfrm>
-          <a:off x="1435590" y="531"/>
-          <a:ext cx="4732020" cy="1242935"/>
+          <a:off x="1507738" y="707092"/>
+          <a:ext cx="4732020" cy="1305401"/>
         </a:xfrm>
         <a:prstGeom prst="rect">
           <a:avLst/>
@@ -1572,7 +1790,7 @@
         <a:fontRef idx="minor"/>
       </dsp:style>
       <dsp:txBody>
-        <a:bodyPr spcFirstLastPara="0" vert="horz" wrap="square" lIns="131544" tIns="131544" rIns="131544" bIns="131544" numCol="1" spcCol="1270" anchor="ctr" anchorCtr="0">
+        <a:bodyPr spcFirstLastPara="0" vert="horz" wrap="square" lIns="138155" tIns="138155" rIns="138155" bIns="138155" numCol="1" spcCol="1270" anchor="ctr" anchorCtr="0">
           <a:noAutofit/>
         </a:bodyPr>
         <a:lstStyle/>
@@ -1590,14 +1808,14 @@
             <a:buNone/>
           </a:pPr>
           <a:r>
-            <a:rPr lang="en-US" sz="2500" kern="1200"/>
+            <a:rPr lang="en-US" sz="2500" kern="1200" dirty="0"/>
             <a:t>Real-Time Analytics Dashboard</a:t>
           </a:r>
         </a:p>
       </dsp:txBody>
       <dsp:txXfrm>
-        <a:off x="1435590" y="531"/>
-        <a:ext cx="4732020" cy="1242935"/>
+        <a:off x="1507738" y="707092"/>
+        <a:ext cx="4732020" cy="1305401"/>
       </dsp:txXfrm>
     </dsp:sp>
     <dsp:sp modelId="{9F005783-6DD3-46AE-B883-F7C94ABD5FD8}">
@@ -1607,8 +1825,8 @@
       </dsp:nvSpPr>
       <dsp:spPr>
         <a:xfrm>
-          <a:off x="6167610" y="531"/>
-          <a:ext cx="4347989" cy="1242935"/>
+          <a:off x="6239758" y="707092"/>
+          <a:ext cx="4275841" cy="1305401"/>
         </a:xfrm>
         <a:prstGeom prst="rect">
           <a:avLst/>
@@ -1632,7 +1850,7 @@
         <a:fontRef idx="minor"/>
       </dsp:style>
       <dsp:txBody>
-        <a:bodyPr spcFirstLastPara="0" vert="horz" wrap="square" lIns="131544" tIns="131544" rIns="131544" bIns="131544" numCol="1" spcCol="1270" anchor="ctr" anchorCtr="0">
+        <a:bodyPr spcFirstLastPara="0" vert="horz" wrap="square" lIns="138155" tIns="138155" rIns="138155" bIns="138155" numCol="1" spcCol="1270" anchor="ctr" anchorCtr="0">
           <a:noAutofit/>
         </a:bodyPr>
         <a:lstStyle/>
@@ -1650,14 +1868,30 @@
             <a:buNone/>
           </a:pPr>
           <a:r>
-            <a:rPr lang="en-US" sz="1800" kern="1200"/>
-            <a:t>Integrate with Amazon QuickSight or Grafana for live visualization of streaming data.</a:t>
+            <a:rPr lang="en-US" sz="1800" kern="1200" dirty="0"/>
+            <a:t>Integrate with Amazon </a:t>
+          </a:r>
+          <a:r>
+            <a:rPr lang="en-US" sz="1800" kern="1200" dirty="0" err="1"/>
+            <a:t>QuickSight</a:t>
+          </a:r>
+          <a:r>
+            <a:rPr lang="en-US" sz="1800" kern="1200" dirty="0"/>
+            <a:t> or </a:t>
+          </a:r>
+          <a:r>
+            <a:rPr lang="en-US" sz="1800" kern="1200" dirty="0" err="1"/>
+            <a:t>Streamlit</a:t>
+          </a:r>
+          <a:r>
+            <a:rPr lang="en-US" sz="1800" kern="1200" dirty="0"/>
+            <a:t> for live visualization of streaming data.</a:t>
           </a:r>
         </a:p>
       </dsp:txBody>
       <dsp:txXfrm>
-        <a:off x="6167610" y="531"/>
-        <a:ext cx="4347989" cy="1242935"/>
+        <a:off x="6239758" y="707092"/>
+        <a:ext cx="4275841" cy="1305401"/>
       </dsp:txXfrm>
     </dsp:sp>
     <dsp:sp modelId="{6B71FFC4-CE36-4402-A5ED-BCA0DFDE9DD6}">
@@ -1667,8 +1901,8 @@
       </dsp:nvSpPr>
       <dsp:spPr>
         <a:xfrm>
-          <a:off x="0" y="1554201"/>
-          <a:ext cx="10515600" cy="1242935"/>
+          <a:off x="0" y="2338844"/>
+          <a:ext cx="10515600" cy="1305401"/>
         </a:xfrm>
         <a:prstGeom prst="roundRect">
           <a:avLst>
@@ -1709,8 +1943,8 @@
       </dsp:nvSpPr>
       <dsp:spPr>
         <a:xfrm>
-          <a:off x="375988" y="1833861"/>
-          <a:ext cx="683614" cy="683614"/>
+          <a:off x="394883" y="2632559"/>
+          <a:ext cx="717970" cy="717970"/>
         </a:xfrm>
         <a:prstGeom prst="rect">
           <a:avLst/>
@@ -1766,8 +2000,8 @@
       </dsp:nvSpPr>
       <dsp:spPr>
         <a:xfrm>
-          <a:off x="1435590" y="1554201"/>
-          <a:ext cx="4732020" cy="1242935"/>
+          <a:off x="1507738" y="2338844"/>
+          <a:ext cx="4732020" cy="1305401"/>
         </a:xfrm>
         <a:prstGeom prst="rect">
           <a:avLst/>
@@ -1791,7 +2025,7 @@
         <a:fontRef idx="minor"/>
       </dsp:style>
       <dsp:txBody>
-        <a:bodyPr spcFirstLastPara="0" vert="horz" wrap="square" lIns="131544" tIns="131544" rIns="131544" bIns="131544" numCol="1" spcCol="1270" anchor="ctr" anchorCtr="0">
+        <a:bodyPr spcFirstLastPara="0" vert="horz" wrap="square" lIns="138155" tIns="138155" rIns="138155" bIns="138155" numCol="1" spcCol="1270" anchor="ctr" anchorCtr="0">
           <a:noAutofit/>
         </a:bodyPr>
         <a:lstStyle/>
@@ -1809,14 +2043,14 @@
             <a:buNone/>
           </a:pPr>
           <a:r>
-            <a:rPr lang="en-US" sz="2500" kern="1200"/>
-            <a:t>Data Quality &amp; Validation Layer</a:t>
+            <a:rPr lang="en-US" sz="2500" kern="1200" dirty="0"/>
+            <a:t>Data Storage Format</a:t>
           </a:r>
         </a:p>
       </dsp:txBody>
       <dsp:txXfrm>
-        <a:off x="1435590" y="1554201"/>
-        <a:ext cx="4732020" cy="1242935"/>
+        <a:off x="1507738" y="2338844"/>
+        <a:ext cx="4732020" cy="1305401"/>
       </dsp:txXfrm>
     </dsp:sp>
     <dsp:sp modelId="{21F28D03-155A-4071-9D67-5C47B793C9F4}">
@@ -1826,8 +2060,8 @@
       </dsp:nvSpPr>
       <dsp:spPr>
         <a:xfrm>
-          <a:off x="6167610" y="1554201"/>
-          <a:ext cx="4347989" cy="1242935"/>
+          <a:off x="6239758" y="2338844"/>
+          <a:ext cx="4275841" cy="1305401"/>
         </a:xfrm>
         <a:prstGeom prst="rect">
           <a:avLst/>
@@ -1851,7 +2085,7 @@
         <a:fontRef idx="minor"/>
       </dsp:style>
       <dsp:txBody>
-        <a:bodyPr spcFirstLastPara="0" vert="horz" wrap="square" lIns="131544" tIns="131544" rIns="131544" bIns="131544" numCol="1" spcCol="1270" anchor="ctr" anchorCtr="0">
+        <a:bodyPr spcFirstLastPara="0" vert="horz" wrap="square" lIns="138155" tIns="138155" rIns="138155" bIns="138155" numCol="1" spcCol="1270" anchor="ctr" anchorCtr="0">
           <a:noAutofit/>
         </a:bodyPr>
         <a:lstStyle/>
@@ -1869,233 +2103,14 @@
             <a:buNone/>
           </a:pPr>
           <a:r>
-            <a:rPr lang="en-US" sz="1800" kern="1200"/>
-            <a:t>Add AWS Lambda or Glue triggers to validate and cleanse data before storage.</a:t>
+            <a:rPr lang="en-US" sz="1800" kern="1200" dirty="0"/>
+            <a:t>Storing data in parquet format for better performance</a:t>
           </a:r>
         </a:p>
       </dsp:txBody>
       <dsp:txXfrm>
-        <a:off x="6167610" y="1554201"/>
-        <a:ext cx="4347989" cy="1242935"/>
-      </dsp:txXfrm>
-    </dsp:sp>
-    <dsp:sp modelId="{2AAA2690-4507-4EA5-B927-A87C17036440}">
-      <dsp:nvSpPr>
-        <dsp:cNvPr id="0" name=""/>
-        <dsp:cNvSpPr/>
-      </dsp:nvSpPr>
-      <dsp:spPr>
-        <a:xfrm>
-          <a:off x="0" y="3107870"/>
-          <a:ext cx="10515600" cy="1242935"/>
-        </a:xfrm>
-        <a:prstGeom prst="roundRect">
-          <a:avLst>
-            <a:gd name="adj" fmla="val 10000"/>
-          </a:avLst>
-        </a:prstGeom>
-        <a:solidFill>
-          <a:schemeClr val="accent1">
-            <a:tint val="40000"/>
-            <a:hueOff val="0"/>
-            <a:satOff val="0"/>
-            <a:lumOff val="0"/>
-            <a:alphaOff val="0"/>
-          </a:schemeClr>
-        </a:solidFill>
-        <a:ln>
-          <a:noFill/>
-        </a:ln>
-        <a:effectLst/>
-      </dsp:spPr>
-      <dsp:style>
-        <a:lnRef idx="0">
-          <a:scrgbClr r="0" g="0" b="0"/>
-        </a:lnRef>
-        <a:fillRef idx="1">
-          <a:scrgbClr r="0" g="0" b="0"/>
-        </a:fillRef>
-        <a:effectRef idx="0">
-          <a:scrgbClr r="0" g="0" b="0"/>
-        </a:effectRef>
-        <a:fontRef idx="minor"/>
-      </dsp:style>
-    </dsp:sp>
-    <dsp:sp modelId="{44244ED6-3982-4A4D-BA06-0F61B295B612}">
-      <dsp:nvSpPr>
-        <dsp:cNvPr id="0" name=""/>
-        <dsp:cNvSpPr/>
-      </dsp:nvSpPr>
-      <dsp:spPr>
-        <a:xfrm>
-          <a:off x="375988" y="3387531"/>
-          <a:ext cx="683614" cy="683614"/>
-        </a:xfrm>
-        <a:prstGeom prst="rect">
-          <a:avLst/>
-        </a:prstGeom>
-        <a:blipFill>
-          <a:blip xmlns:r="http://schemas.openxmlformats.org/officeDocument/2006/relationships" r:embed="rId5">
-            <a:extLst>
-              <a:ext uri="{28A0092B-C50C-407E-A947-70E740481C1C}">
-                <a14:useLocalDpi xmlns:a14="http://schemas.microsoft.com/office/drawing/2010/main" val="0"/>
-              </a:ext>
-              <a:ext uri="{96DAC541-7B7A-43D3-8B79-37D633B846F1}">
-                <asvg:svgBlip xmlns:asvg="http://schemas.microsoft.com/office/drawing/2016/SVG/main" r:embed="rId6"/>
-              </a:ext>
-            </a:extLst>
-          </a:blip>
-          <a:stretch>
-            <a:fillRect/>
-          </a:stretch>
-        </a:blipFill>
-        <a:ln w="19050" cap="flat" cmpd="sng" algn="ctr">
-          <a:solidFill>
-            <a:schemeClr val="lt1">
-              <a:hueOff val="0"/>
-              <a:satOff val="0"/>
-              <a:lumOff val="0"/>
-              <a:alphaOff val="0"/>
-            </a:schemeClr>
-          </a:solidFill>
-          <a:prstDash val="solid"/>
-          <a:miter lim="800000"/>
-        </a:ln>
-        <a:effectLst/>
-      </dsp:spPr>
-      <dsp:style>
-        <a:lnRef idx="2">
-          <a:scrgbClr r="0" g="0" b="0"/>
-        </a:lnRef>
-        <a:fillRef idx="1">
-          <a:scrgbClr r="0" g="0" b="0"/>
-        </a:fillRef>
-        <a:effectRef idx="0">
-          <a:scrgbClr r="0" g="0" b="0"/>
-        </a:effectRef>
-        <a:fontRef idx="minor">
-          <a:schemeClr val="lt1"/>
-        </a:fontRef>
-      </dsp:style>
-    </dsp:sp>
-    <dsp:sp modelId="{00188DA9-03B3-49F9-A18A-BA6D97A9B477}">
-      <dsp:nvSpPr>
-        <dsp:cNvPr id="0" name=""/>
-        <dsp:cNvSpPr/>
-      </dsp:nvSpPr>
-      <dsp:spPr>
-        <a:xfrm>
-          <a:off x="1435590" y="3107870"/>
-          <a:ext cx="4732020" cy="1242935"/>
-        </a:xfrm>
-        <a:prstGeom prst="rect">
-          <a:avLst/>
-        </a:prstGeom>
-        <a:noFill/>
-        <a:ln>
-          <a:noFill/>
-        </a:ln>
-        <a:effectLst/>
-      </dsp:spPr>
-      <dsp:style>
-        <a:lnRef idx="0">
-          <a:scrgbClr r="0" g="0" b="0"/>
-        </a:lnRef>
-        <a:fillRef idx="0">
-          <a:scrgbClr r="0" g="0" b="0"/>
-        </a:fillRef>
-        <a:effectRef idx="0">
-          <a:scrgbClr r="0" g="0" b="0"/>
-        </a:effectRef>
-        <a:fontRef idx="minor"/>
-      </dsp:style>
-      <dsp:txBody>
-        <a:bodyPr spcFirstLastPara="0" vert="horz" wrap="square" lIns="131544" tIns="131544" rIns="131544" bIns="131544" numCol="1" spcCol="1270" anchor="ctr" anchorCtr="0">
-          <a:noAutofit/>
-        </a:bodyPr>
-        <a:lstStyle/>
-        <a:p>
-          <a:pPr marL="0" lvl="0" indent="0" algn="l" defTabSz="1111250">
-            <a:lnSpc>
-              <a:spcPct val="100000"/>
-            </a:lnSpc>
-            <a:spcBef>
-              <a:spcPct val="0"/>
-            </a:spcBef>
-            <a:spcAft>
-              <a:spcPct val="35000"/>
-            </a:spcAft>
-            <a:buNone/>
-          </a:pPr>
-          <a:r>
-            <a:rPr lang="en-US" sz="2500" kern="1200"/>
-            <a:t>Scalable Multi-Stream Integration</a:t>
-          </a:r>
-        </a:p>
-      </dsp:txBody>
-      <dsp:txXfrm>
-        <a:off x="1435590" y="3107870"/>
-        <a:ext cx="4732020" cy="1242935"/>
-      </dsp:txXfrm>
-    </dsp:sp>
-    <dsp:sp modelId="{117A92CF-0D0C-44D9-B3E1-C1C9F8F54276}">
-      <dsp:nvSpPr>
-        <dsp:cNvPr id="0" name=""/>
-        <dsp:cNvSpPr/>
-      </dsp:nvSpPr>
-      <dsp:spPr>
-        <a:xfrm>
-          <a:off x="6167610" y="3107870"/>
-          <a:ext cx="4347989" cy="1242935"/>
-        </a:xfrm>
-        <a:prstGeom prst="rect">
-          <a:avLst/>
-        </a:prstGeom>
-        <a:noFill/>
-        <a:ln>
-          <a:noFill/>
-        </a:ln>
-        <a:effectLst/>
-      </dsp:spPr>
-      <dsp:style>
-        <a:lnRef idx="0">
-          <a:scrgbClr r="0" g="0" b="0"/>
-        </a:lnRef>
-        <a:fillRef idx="0">
-          <a:scrgbClr r="0" g="0" b="0"/>
-        </a:fillRef>
-        <a:effectRef idx="0">
-          <a:scrgbClr r="0" g="0" b="0"/>
-        </a:effectRef>
-        <a:fontRef idx="minor"/>
-      </dsp:style>
-      <dsp:txBody>
-        <a:bodyPr spcFirstLastPara="0" vert="horz" wrap="square" lIns="131544" tIns="131544" rIns="131544" bIns="131544" numCol="1" spcCol="1270" anchor="ctr" anchorCtr="0">
-          <a:noAutofit/>
-        </a:bodyPr>
-        <a:lstStyle/>
-        <a:p>
-          <a:pPr marL="0" lvl="0" indent="0" algn="l" defTabSz="800100">
-            <a:lnSpc>
-              <a:spcPct val="100000"/>
-            </a:lnSpc>
-            <a:spcBef>
-              <a:spcPct val="0"/>
-            </a:spcBef>
-            <a:spcAft>
-              <a:spcPct val="35000"/>
-            </a:spcAft>
-            <a:buNone/>
-          </a:pPr>
-          <a:r>
-            <a:rPr lang="en-US" sz="1800" kern="1200"/>
-            <a:t>Extend the pipeline to handle multiple Kinesis streams for different data sources or applications.</a:t>
-          </a:r>
-        </a:p>
-      </dsp:txBody>
-      <dsp:txXfrm>
-        <a:off x="6167610" y="3107870"/>
-        <a:ext cx="4347989" cy="1242935"/>
+        <a:off x="6239758" y="2338844"/>
+        <a:ext cx="4275841" cy="1305401"/>
       </dsp:txXfrm>
     </dsp:sp>
   </dsp:spTree>
@@ -3512,7 +3527,7 @@
           <a:p>
             <a:fld id="{FD7290A8-C7CA-4A86-92B0-CF43A115FDCB}" type="datetimeFigureOut">
               <a:rPr lang="en-US" smtClean="0"/>
-              <a:t>11/6/2025</a:t>
+              <a:t>11/8/2025</a:t>
             </a:fld>
             <a:endParaRPr lang="en-US"/>
           </a:p>
@@ -4327,6 +4342,501 @@
 </p:notes>
 </file>
 
+<file path=ppt/notesSlides/notesSlide12.xml><?xml version="1.0" encoding="utf-8"?>
+<p:notes xmlns:a="http://schemas.openxmlformats.org/drawingml/2006/main" xmlns:r="http://schemas.openxmlformats.org/officeDocument/2006/relationships" xmlns:p="http://schemas.openxmlformats.org/presentationml/2006/main">
+  <p:cSld>
+    <p:spTree>
+      <p:nvGrpSpPr>
+        <p:cNvPr id="1" name=""/>
+        <p:cNvGrpSpPr/>
+        <p:nvPr/>
+      </p:nvGrpSpPr>
+      <p:grpSpPr>
+        <a:xfrm>
+          <a:off x="0" y="0"/>
+          <a:ext cx="0" cy="0"/>
+          <a:chOff x="0" y="0"/>
+          <a:chExt cx="0" cy="0"/>
+        </a:xfrm>
+      </p:grpSpPr>
+      <p:sp>
+        <p:nvSpPr>
+          <p:cNvPr id="2" name="Slide Image Placeholder 1"/>
+          <p:cNvSpPr>
+            <a:spLocks noGrp="1" noRot="1" noChangeAspect="1"/>
+          </p:cNvSpPr>
+          <p:nvPr>
+            <p:ph type="sldImg"/>
+          </p:nvPr>
+        </p:nvSpPr>
+        <p:spPr/>
+      </p:sp>
+      <p:sp>
+        <p:nvSpPr>
+          <p:cNvPr id="3" name="Notes Placeholder 2"/>
+          <p:cNvSpPr>
+            <a:spLocks noGrp="1"/>
+          </p:cNvSpPr>
+          <p:nvPr>
+            <p:ph type="body" idx="1"/>
+          </p:nvPr>
+        </p:nvSpPr>
+        <p:spPr/>
+        <p:txBody>
+          <a:bodyPr/>
+          <a:lstStyle/>
+          <a:p>
+            <a:pPr marL="0" marR="0" lvl="0" indent="0" algn="l" defTabSz="914400" rtl="0" eaLnBrk="1" fontAlgn="auto" latinLnBrk="0" hangingPunct="1">
+              <a:lnSpc>
+                <a:spcPct val="100000"/>
+              </a:lnSpc>
+              <a:spcBef>
+                <a:spcPts val="0"/>
+              </a:spcBef>
+              <a:spcAft>
+                <a:spcPts val="0"/>
+              </a:spcAft>
+              <a:buClrTx/>
+              <a:buSzTx/>
+              <a:buFontTx/>
+              <a:buNone/>
+              <a:tabLst/>
+              <a:defRPr/>
+            </a:pPr>
+            <a:r>
+              <a:rPr lang="en-IN" sz="1200" dirty="0"/>
+              <a:t>: Incoming mobile log data instantly processed and stored in S3.</a:t>
+            </a:r>
+          </a:p>
+          <a:p>
+            <a:endParaRPr lang="en-IN" dirty="0"/>
+          </a:p>
+          <a:p>
+            <a:pPr marL="0" marR="0" lvl="0" indent="0" algn="l" defTabSz="914400" rtl="0" eaLnBrk="1" fontAlgn="auto" latinLnBrk="0" hangingPunct="1">
+              <a:lnSpc>
+                <a:spcPct val="100000"/>
+              </a:lnSpc>
+              <a:spcBef>
+                <a:spcPts val="0"/>
+              </a:spcBef>
+              <a:spcAft>
+                <a:spcPts val="0"/>
+              </a:spcAft>
+              <a:buClrTx/>
+              <a:buSzTx/>
+              <a:buFontTx/>
+              <a:buNone/>
+              <a:tabLst/>
+              <a:defRPr/>
+            </a:pPr>
+            <a:r>
+              <a:rPr lang="en-IN" sz="1200" dirty="0"/>
+              <a:t> : JSON stream transformed into timestamped, analytics-ready CSV files.</a:t>
+            </a:r>
+          </a:p>
+          <a:p>
+            <a:endParaRPr lang="en-IN" dirty="0"/>
+          </a:p>
+          <a:p>
+            <a:pPr marL="0" marR="0" lvl="0" indent="0" algn="l" defTabSz="914400" rtl="0" eaLnBrk="1" fontAlgn="auto" latinLnBrk="0" hangingPunct="1">
+              <a:lnSpc>
+                <a:spcPct val="100000"/>
+              </a:lnSpc>
+              <a:spcBef>
+                <a:spcPts val="0"/>
+              </a:spcBef>
+              <a:spcAft>
+                <a:spcPts val="0"/>
+              </a:spcAft>
+              <a:buClrTx/>
+              <a:buSzTx/>
+              <a:buFontTx/>
+              <a:buNone/>
+              <a:tabLst/>
+              <a:defRPr/>
+            </a:pPr>
+            <a:r>
+              <a:rPr lang="en-IN" sz="1200" dirty="0"/>
+              <a:t> : Teams can query live data using Amazon Athena without manual ETL steps.</a:t>
+            </a:r>
+          </a:p>
+          <a:p>
+            <a:pPr marL="0" marR="0" lvl="0" indent="0" algn="l" defTabSz="914400" rtl="0" eaLnBrk="1" fontAlgn="auto" latinLnBrk="0" hangingPunct="1">
+              <a:lnSpc>
+                <a:spcPct val="100000"/>
+              </a:lnSpc>
+              <a:spcBef>
+                <a:spcPts val="0"/>
+              </a:spcBef>
+              <a:spcAft>
+                <a:spcPts val="0"/>
+              </a:spcAft>
+              <a:buClrTx/>
+              <a:buSzTx/>
+              <a:buFontTx/>
+              <a:buNone/>
+              <a:tabLst/>
+              <a:defRPr/>
+            </a:pPr>
+            <a:endParaRPr lang="en-IN" sz="1200" dirty="0"/>
+          </a:p>
+          <a:p>
+            <a:pPr marL="0" marR="0" lvl="0" indent="0" algn="l" defTabSz="914400" rtl="0" eaLnBrk="1" fontAlgn="auto" latinLnBrk="0" hangingPunct="1">
+              <a:lnSpc>
+                <a:spcPct val="100000"/>
+              </a:lnSpc>
+              <a:spcBef>
+                <a:spcPts val="0"/>
+              </a:spcBef>
+              <a:spcAft>
+                <a:spcPts val="0"/>
+              </a:spcAft>
+              <a:buClrTx/>
+              <a:buSzTx/>
+              <a:buFontTx/>
+              <a:buNone/>
+              <a:tabLst/>
+              <a:defRPr/>
+            </a:pPr>
+            <a:r>
+              <a:rPr lang="en-IN" sz="1200" dirty="0"/>
+              <a:t>: The pipeline can easily integrate new data sources or analytics dashboards (</a:t>
+            </a:r>
+            <a:r>
+              <a:rPr lang="en-IN" sz="1200" dirty="0" err="1"/>
+              <a:t>QuickSight</a:t>
+            </a:r>
+            <a:r>
+              <a:rPr lang="en-IN" sz="1200" dirty="0"/>
+              <a:t>, Power BI).</a:t>
+            </a:r>
+          </a:p>
+          <a:p>
+            <a:endParaRPr lang="en-IN" dirty="0"/>
+          </a:p>
+        </p:txBody>
+      </p:sp>
+      <p:sp>
+        <p:nvSpPr>
+          <p:cNvPr id="4" name="Slide Number Placeholder 3"/>
+          <p:cNvSpPr>
+            <a:spLocks noGrp="1"/>
+          </p:cNvSpPr>
+          <p:nvPr>
+            <p:ph type="sldNum" sz="quarter" idx="5"/>
+          </p:nvPr>
+        </p:nvSpPr>
+        <p:spPr/>
+        <p:txBody>
+          <a:bodyPr/>
+          <a:lstStyle/>
+          <a:p>
+            <a:fld id="{27B8D544-1094-44AC-945A-825F4ED59BEA}" type="slidenum">
+              <a:rPr lang="en-US" smtClean="0"/>
+              <a:t>16</a:t>
+            </a:fld>
+            <a:endParaRPr lang="en-US"/>
+          </a:p>
+        </p:txBody>
+      </p:sp>
+    </p:spTree>
+    <p:extLst>
+      <p:ext uri="{BB962C8B-B14F-4D97-AF65-F5344CB8AC3E}">
+        <p14:creationId xmlns:p14="http://schemas.microsoft.com/office/powerpoint/2010/main" val="1119249540"/>
+      </p:ext>
+    </p:extLst>
+  </p:cSld>
+  <p:clrMapOvr>
+    <a:masterClrMapping/>
+  </p:clrMapOvr>
+</p:notes>
+</file>
+
+<file path=ppt/notesSlides/notesSlide13.xml><?xml version="1.0" encoding="utf-8"?>
+<p:notes xmlns:a="http://schemas.openxmlformats.org/drawingml/2006/main" xmlns:r="http://schemas.openxmlformats.org/officeDocument/2006/relationships" xmlns:p="http://schemas.openxmlformats.org/presentationml/2006/main">
+  <p:cSld>
+    <p:spTree>
+      <p:nvGrpSpPr>
+        <p:cNvPr id="1" name=""/>
+        <p:cNvGrpSpPr/>
+        <p:nvPr/>
+      </p:nvGrpSpPr>
+      <p:grpSpPr>
+        <a:xfrm>
+          <a:off x="0" y="0"/>
+          <a:ext cx="0" cy="0"/>
+          <a:chOff x="0" y="0"/>
+          <a:chExt cx="0" cy="0"/>
+        </a:xfrm>
+      </p:grpSpPr>
+      <p:sp>
+        <p:nvSpPr>
+          <p:cNvPr id="2" name="Slide Image Placeholder 1"/>
+          <p:cNvSpPr>
+            <a:spLocks noGrp="1" noRot="1" noChangeAspect="1"/>
+          </p:cNvSpPr>
+          <p:nvPr>
+            <p:ph type="sldImg"/>
+          </p:nvPr>
+        </p:nvSpPr>
+        <p:spPr/>
+      </p:sp>
+      <p:sp>
+        <p:nvSpPr>
+          <p:cNvPr id="3" name="Notes Placeholder 2"/>
+          <p:cNvSpPr>
+            <a:spLocks noGrp="1"/>
+          </p:cNvSpPr>
+          <p:nvPr>
+            <p:ph type="body" idx="1"/>
+          </p:nvPr>
+        </p:nvSpPr>
+        <p:spPr/>
+        <p:txBody>
+          <a:bodyPr/>
+          <a:lstStyle/>
+          <a:p>
+            <a:pPr marL="0" marR="0" lvl="0" indent="0" algn="l" defTabSz="914400" rtl="0" eaLnBrk="1" fontAlgn="auto" latinLnBrk="0" hangingPunct="1">
+              <a:lnSpc>
+                <a:spcPct val="100000"/>
+              </a:lnSpc>
+              <a:spcBef>
+                <a:spcPts val="0"/>
+              </a:spcBef>
+              <a:spcAft>
+                <a:spcPts val="0"/>
+              </a:spcAft>
+              <a:buClrTx/>
+              <a:buSzTx/>
+              <a:buFontTx/>
+              <a:buNone/>
+              <a:tabLst/>
+              <a:defRPr/>
+            </a:pPr>
+            <a:r>
+              <a:rPr lang="en-US" sz="1200" dirty="0"/>
+              <a:t>: Learned how to build a real-time data pipeline connecting Kinesis Data Stream → AWS Glue → S3 → Athena for end-to-end data processing.</a:t>
+            </a:r>
+          </a:p>
+          <a:p>
+            <a:endParaRPr lang="en-IN" dirty="0"/>
+          </a:p>
+          <a:p>
+            <a:pPr marL="0" marR="0" lvl="0" indent="0" algn="l" defTabSz="914400" rtl="0" eaLnBrk="1" fontAlgn="auto" latinLnBrk="0" hangingPunct="1">
+              <a:lnSpc>
+                <a:spcPct val="100000"/>
+              </a:lnSpc>
+              <a:spcBef>
+                <a:spcPts val="0"/>
+              </a:spcBef>
+              <a:spcAft>
+                <a:spcPts val="0"/>
+              </a:spcAft>
+              <a:buClrTx/>
+              <a:buSzTx/>
+              <a:buFontTx/>
+              <a:buNone/>
+              <a:tabLst/>
+              <a:defRPr/>
+            </a:pPr>
+            <a:r>
+              <a:rPr lang="en-US" sz="1200" dirty="0"/>
+              <a:t>Streaming : Gained hands-on experience with reading continuous streams and writing results.</a:t>
+            </a:r>
+          </a:p>
+          <a:p>
+            <a:pPr marL="0" marR="0" lvl="0" indent="0" algn="l" defTabSz="914400" rtl="0" eaLnBrk="1" fontAlgn="auto" latinLnBrk="0" hangingPunct="1">
+              <a:lnSpc>
+                <a:spcPct val="100000"/>
+              </a:lnSpc>
+              <a:spcBef>
+                <a:spcPts val="0"/>
+              </a:spcBef>
+              <a:spcAft>
+                <a:spcPts val="0"/>
+              </a:spcAft>
+              <a:buClrTx/>
+              <a:buSzTx/>
+              <a:buFontTx/>
+              <a:buNone/>
+              <a:tabLst/>
+              <a:defRPr/>
+            </a:pPr>
+            <a:endParaRPr lang="en-US" sz="1200" dirty="0"/>
+          </a:p>
+          <a:p>
+            <a:pPr marL="0" marR="0" lvl="0" indent="0" algn="l" defTabSz="914400" rtl="0" eaLnBrk="1" fontAlgn="auto" latinLnBrk="0" hangingPunct="1">
+              <a:lnSpc>
+                <a:spcPct val="100000"/>
+              </a:lnSpc>
+              <a:spcBef>
+                <a:spcPts val="0"/>
+              </a:spcBef>
+              <a:spcAft>
+                <a:spcPts val="0"/>
+              </a:spcAft>
+              <a:buClrTx/>
+              <a:buSzTx/>
+              <a:buFontTx/>
+              <a:buNone/>
+              <a:tabLst/>
+              <a:defRPr/>
+            </a:pPr>
+            <a:r>
+              <a:rPr lang="en-IN" sz="1200" dirty="0"/>
+              <a:t>Transformation : Practiced defining JSON schemas, parsing dynamic data, and transforming raw data into structured CSV output.</a:t>
+            </a:r>
+          </a:p>
+          <a:p>
+            <a:pPr marL="0" marR="0" lvl="0" indent="0" algn="l" defTabSz="914400" rtl="0" eaLnBrk="1" fontAlgn="auto" latinLnBrk="0" hangingPunct="1">
+              <a:lnSpc>
+                <a:spcPct val="100000"/>
+              </a:lnSpc>
+              <a:spcBef>
+                <a:spcPts val="0"/>
+              </a:spcBef>
+              <a:spcAft>
+                <a:spcPts val="0"/>
+              </a:spcAft>
+              <a:buClrTx/>
+              <a:buSzTx/>
+              <a:buFontTx/>
+              <a:buNone/>
+              <a:tabLst/>
+              <a:defRPr/>
+            </a:pPr>
+            <a:endParaRPr lang="en-US" sz="1200" dirty="0"/>
+          </a:p>
+          <a:p>
+            <a:pPr marL="0" marR="0" lvl="0" indent="0" algn="l" defTabSz="914400" rtl="0" eaLnBrk="1" fontAlgn="auto" latinLnBrk="0" hangingPunct="1">
+              <a:lnSpc>
+                <a:spcPct val="100000"/>
+              </a:lnSpc>
+              <a:spcBef>
+                <a:spcPts val="0"/>
+              </a:spcBef>
+              <a:spcAft>
+                <a:spcPts val="0"/>
+              </a:spcAft>
+              <a:buClrTx/>
+              <a:buSzTx/>
+              <a:buFontTx/>
+              <a:buNone/>
+              <a:tabLst/>
+              <a:defRPr/>
+            </a:pPr>
+            <a:r>
+              <a:rPr lang="en-US" sz="1200" dirty="0"/>
+              <a:t>: Developed a local test setup using Docker + Spark to simulate streaming with JSON files before deploying to AWS. </a:t>
+            </a:r>
+          </a:p>
+          <a:p>
+            <a:pPr marL="0" marR="0" lvl="0" indent="0" algn="l" defTabSz="914400" rtl="0" eaLnBrk="1" fontAlgn="auto" latinLnBrk="0" hangingPunct="1">
+              <a:lnSpc>
+                <a:spcPct val="100000"/>
+              </a:lnSpc>
+              <a:spcBef>
+                <a:spcPts val="0"/>
+              </a:spcBef>
+              <a:spcAft>
+                <a:spcPts val="0"/>
+              </a:spcAft>
+              <a:buClrTx/>
+              <a:buSzTx/>
+              <a:buFontTx/>
+              <a:buNone/>
+              <a:tabLst/>
+              <a:defRPr/>
+            </a:pPr>
+            <a:endParaRPr lang="en-US" sz="1200" dirty="0"/>
+          </a:p>
+          <a:p>
+            <a:pPr marL="0" marR="0" lvl="0" indent="0" algn="l" defTabSz="914400" rtl="0" eaLnBrk="1" fontAlgn="auto" latinLnBrk="0" hangingPunct="1">
+              <a:lnSpc>
+                <a:spcPct val="100000"/>
+              </a:lnSpc>
+              <a:spcBef>
+                <a:spcPts val="0"/>
+              </a:spcBef>
+              <a:spcAft>
+                <a:spcPts val="0"/>
+              </a:spcAft>
+              <a:buClrTx/>
+              <a:buSzTx/>
+              <a:buFontTx/>
+              <a:buNone/>
+              <a:tabLst/>
+              <a:defRPr/>
+            </a:pPr>
+            <a:r>
+              <a:rPr lang="en-US" sz="1200" dirty="0"/>
+              <a:t>: Explored Glue Catalog, Athena, and S3 as a seamless ecosystem for data storage, querying, and analytics.</a:t>
+            </a:r>
+          </a:p>
+          <a:p>
+            <a:pPr marL="0" marR="0" lvl="0" indent="0" algn="l" defTabSz="914400" rtl="0" eaLnBrk="1" fontAlgn="auto" latinLnBrk="0" hangingPunct="1">
+              <a:lnSpc>
+                <a:spcPct val="100000"/>
+              </a:lnSpc>
+              <a:spcBef>
+                <a:spcPts val="0"/>
+              </a:spcBef>
+              <a:spcAft>
+                <a:spcPts val="0"/>
+              </a:spcAft>
+              <a:buClrTx/>
+              <a:buSzTx/>
+              <a:buFontTx/>
+              <a:buNone/>
+              <a:tabLst/>
+              <a:defRPr/>
+            </a:pPr>
+            <a:endParaRPr lang="en-US" sz="1200" dirty="0"/>
+          </a:p>
+          <a:p>
+            <a:endParaRPr lang="en-IN" dirty="0"/>
+          </a:p>
+          <a:p>
+            <a:endParaRPr lang="en-IN" dirty="0"/>
+          </a:p>
+        </p:txBody>
+      </p:sp>
+      <p:sp>
+        <p:nvSpPr>
+          <p:cNvPr id="4" name="Slide Number Placeholder 3"/>
+          <p:cNvSpPr>
+            <a:spLocks noGrp="1"/>
+          </p:cNvSpPr>
+          <p:nvPr>
+            <p:ph type="sldNum" sz="quarter" idx="5"/>
+          </p:nvPr>
+        </p:nvSpPr>
+        <p:spPr/>
+        <p:txBody>
+          <a:bodyPr/>
+          <a:lstStyle/>
+          <a:p>
+            <a:fld id="{27B8D544-1094-44AC-945A-825F4ED59BEA}" type="slidenum">
+              <a:rPr lang="en-US" smtClean="0"/>
+              <a:t>17</a:t>
+            </a:fld>
+            <a:endParaRPr lang="en-US"/>
+          </a:p>
+        </p:txBody>
+      </p:sp>
+    </p:spTree>
+    <p:extLst>
+      <p:ext uri="{BB962C8B-B14F-4D97-AF65-F5344CB8AC3E}">
+        <p14:creationId xmlns:p14="http://schemas.microsoft.com/office/powerpoint/2010/main" val="776928016"/>
+      </p:ext>
+    </p:extLst>
+  </p:cSld>
+  <p:clrMapOvr>
+    <a:masterClrMapping/>
+  </p:clrMapOvr>
+</p:notes>
+</file>
+
 <file path=ppt/notesSlides/notesSlide2.xml><?xml version="1.0" encoding="utf-8"?>
 <p:notes xmlns:a="http://schemas.openxmlformats.org/drawingml/2006/main" xmlns:r="http://schemas.openxmlformats.org/officeDocument/2006/relationships" xmlns:p="http://schemas.openxmlformats.org/presentationml/2006/main">
   <p:cSld>
@@ -4373,428 +4883,26 @@
           <a:p>
             <a:r>
               <a:rPr lang="en-US" b="1" dirty="0"/>
-              <a:t>Purpose</a:t>
-            </a:r>
-          </a:p>
-          <a:p>
-            <a:r>
-              <a:rPr lang="en-US" dirty="0"/>
-              <a:t>To build a </a:t>
-            </a:r>
+              <a:t>Kinesis - data ingestion __It is getting the data in real time from python producer script</a:t>
+            </a:r>
+          </a:p>
+          <a:p>
             <a:r>
               <a:rPr lang="en-US" b="1" dirty="0"/>
-              <a:t>real-time data ingestion and processing pipeline</a:t>
-            </a:r>
-            <a:r>
-              <a:rPr lang="en-US" dirty="0"/>
-              <a:t> using AWS services for mobile log data — ensuring scalability, automation, and analytical insights.</a:t>
-            </a:r>
-          </a:p>
-          <a:p>
-            <a:br>
-              <a:rPr lang="en-US" dirty="0"/>
-            </a:br>
+              <a:t>Glue job - reads data continuously from KDS transforms it and performs aggregation. It stores in s3</a:t>
+            </a:r>
+          </a:p>
+          <a:p>
             <a:r>
               <a:rPr lang="en-US" b="1" dirty="0"/>
-              <a:t>Architecture Overview</a:t>
-            </a:r>
-          </a:p>
-          <a:p>
-            <a:r>
-              <a:rPr lang="en-US" dirty="0"/>
-              <a:t>This pipeline automates the </a:t>
-            </a:r>
+              <a:t>S3 acts as central data lake which stores the data</a:t>
+            </a:r>
+          </a:p>
+          <a:p>
             <a:r>
               <a:rPr lang="en-US" b="1" dirty="0"/>
-              <a:t>flow of data</a:t>
-            </a:r>
-            <a:r>
-              <a:rPr lang="en-US" dirty="0"/>
-              <a:t> from a CSV dataset to real-time analytics through five major layers:</a:t>
-            </a:r>
-          </a:p>
-          <a:p>
-            <a:br>
-              <a:rPr lang="en-US" dirty="0"/>
-            </a:br>
-            <a:endParaRPr lang="en-US" dirty="0"/>
-          </a:p>
-          <a:p>
-            <a:r>
-              <a:rPr lang="en-US" b="1" dirty="0"/>
-              <a:t>Data Source Layer</a:t>
-            </a:r>
-          </a:p>
-          <a:p>
-            <a:r>
-              <a:rPr lang="en-US" dirty="0"/>
-              <a:t>The raw dataset (</a:t>
-            </a:r>
-            <a:r>
-              <a:rPr lang="en-US" sz="1300" dirty="0"/>
-              <a:t>Mobile Logs CSV</a:t>
-            </a:r>
-            <a:r>
-              <a:rPr lang="en-US" dirty="0"/>
-              <a:t>) acts as the data source.</a:t>
-            </a:r>
-          </a:p>
-          <a:p>
-            <a:r>
-              <a:rPr lang="en-US" dirty="0"/>
-              <a:t>A </a:t>
-            </a:r>
-            <a:r>
-              <a:rPr lang="en-US" b="1" dirty="0"/>
-              <a:t>Python Producer Script</a:t>
-            </a:r>
-            <a:r>
-              <a:rPr lang="en-US" dirty="0"/>
-              <a:t> (using </a:t>
-            </a:r>
-            <a:r>
-              <a:rPr lang="en-US" sz="1300" dirty="0"/>
-              <a:t>boto3</a:t>
-            </a:r>
-            <a:r>
-              <a:rPr lang="en-US" dirty="0"/>
-              <a:t>) reads the dataset and sends records as </a:t>
-            </a:r>
-            <a:r>
-              <a:rPr lang="en-US" b="1" dirty="0"/>
-              <a:t>JSON streams</a:t>
-            </a:r>
-            <a:r>
-              <a:rPr lang="en-US" dirty="0"/>
-              <a:t>.</a:t>
-            </a:r>
-          </a:p>
-          <a:p>
-            <a:r>
-              <a:rPr lang="en-US" dirty="0"/>
-              <a:t>This simulates live log events being pushed into AWS.</a:t>
-            </a:r>
-          </a:p>
-          <a:p>
-            <a:br>
-              <a:rPr lang="en-US" dirty="0"/>
-            </a:br>
-            <a:endParaRPr lang="en-US" dirty="0"/>
-          </a:p>
-          <a:p>
-            <a:r>
-              <a:rPr lang="en-US" b="1" dirty="0"/>
-              <a:t>Ingestion Layer</a:t>
-            </a:r>
-          </a:p>
-          <a:p>
-            <a:r>
-              <a:rPr lang="en-US" b="1" dirty="0"/>
-              <a:t>Amazon Kinesis Data Stream</a:t>
-            </a:r>
-            <a:r>
-              <a:rPr lang="en-US" dirty="0"/>
-              <a:t> receives and buffers streaming data in real time.</a:t>
-            </a:r>
-          </a:p>
-          <a:p>
-            <a:r>
-              <a:rPr lang="en-US" dirty="0"/>
-              <a:t>It can handle high-throughput streams and ensure message durability.</a:t>
-            </a:r>
-          </a:p>
-          <a:p>
-            <a:r>
-              <a:rPr lang="en-US" dirty="0"/>
-              <a:t>Data is then forwarded for ETL processing.</a:t>
-            </a:r>
-          </a:p>
-          <a:p>
-            <a:br>
-              <a:rPr lang="en-US" dirty="0"/>
-            </a:br>
-            <a:r>
-              <a:rPr lang="en-US" b="1" dirty="0"/>
-              <a:t>Processing Layer</a:t>
-            </a:r>
-          </a:p>
-          <a:p>
-            <a:r>
-              <a:rPr lang="en-US" b="1" dirty="0"/>
-              <a:t>AWS Glue Streaming Job</a:t>
-            </a:r>
-            <a:r>
-              <a:rPr lang="en-US" dirty="0"/>
-              <a:t> (</a:t>
-            </a:r>
-            <a:r>
-              <a:rPr lang="en-US" dirty="0" err="1"/>
-              <a:t>PySpark</a:t>
-            </a:r>
-            <a:r>
-              <a:rPr lang="en-US" dirty="0"/>
-              <a:t> ETL) processes incoming JSON data continuously.</a:t>
-            </a:r>
-          </a:p>
-          <a:p>
-            <a:pPr lvl="1"/>
-            <a:r>
-              <a:rPr lang="en-US" dirty="0"/>
-              <a:t>Cleans and transforms records.</a:t>
-            </a:r>
-          </a:p>
-          <a:p>
-            <a:pPr lvl="1"/>
-            <a:r>
-              <a:rPr lang="en-US" dirty="0"/>
-              <a:t>Applies schema mapping and filtering.</a:t>
-            </a:r>
-          </a:p>
-          <a:p>
-            <a:r>
-              <a:rPr lang="en-US" b="1" dirty="0"/>
-              <a:t>AWS Glue Crawler</a:t>
-            </a:r>
-            <a:r>
-              <a:rPr lang="en-US" dirty="0"/>
-              <a:t> automatically updates the </a:t>
-            </a:r>
-            <a:r>
-              <a:rPr lang="en-US" b="1" dirty="0"/>
-              <a:t>Data Catalog</a:t>
-            </a:r>
-            <a:r>
-              <a:rPr lang="en-US" dirty="0"/>
-              <a:t>, ensuring schemas are inferred dynamically.</a:t>
-            </a:r>
-          </a:p>
-          <a:p>
-            <a:r>
-              <a:rPr lang="en-US" dirty="0"/>
-              <a:t>Output: </a:t>
-            </a:r>
-            <a:r>
-              <a:rPr lang="en-US" b="1" dirty="0"/>
-              <a:t>Cleaned &amp; Structured CSV data</a:t>
-            </a:r>
-            <a:r>
-              <a:rPr lang="en-US" dirty="0"/>
-              <a:t>.</a:t>
-            </a:r>
-          </a:p>
-          <a:p>
-            <a:br>
-              <a:rPr lang="en-US" dirty="0"/>
-            </a:br>
-            <a:endParaRPr lang="en-US" dirty="0"/>
-          </a:p>
-          <a:p>
-            <a:r>
-              <a:rPr lang="en-US" b="1" dirty="0"/>
-              <a:t> Storage Layer</a:t>
-            </a:r>
-          </a:p>
-          <a:p>
-            <a:r>
-              <a:rPr lang="en-US" b="1" dirty="0"/>
-              <a:t>Amazon S3</a:t>
-            </a:r>
-            <a:r>
-              <a:rPr lang="en-US" dirty="0"/>
-              <a:t> acts as the central data lake.</a:t>
-            </a:r>
-          </a:p>
-          <a:p>
-            <a:pPr lvl="1"/>
-            <a:r>
-              <a:rPr lang="en-US" sz="1300" dirty="0"/>
-              <a:t>raw/</a:t>
-            </a:r>
-            <a:r>
-              <a:rPr lang="en-US" dirty="0"/>
-              <a:t> → raw incoming data</a:t>
-            </a:r>
-          </a:p>
-          <a:p>
-            <a:pPr lvl="1"/>
-            <a:r>
-              <a:rPr lang="en-US" sz="1300" dirty="0"/>
-              <a:t>processed/</a:t>
-            </a:r>
-            <a:r>
-              <a:rPr lang="en-US" dirty="0"/>
-              <a:t> → transformed/cleaned data</a:t>
-            </a:r>
-          </a:p>
-          <a:p>
-            <a:pPr lvl="1"/>
-            <a:r>
-              <a:rPr lang="en-US" sz="1300" dirty="0"/>
-              <a:t>query-results/</a:t>
-            </a:r>
-            <a:r>
-              <a:rPr lang="en-US" dirty="0"/>
-              <a:t> → Athena query outputs</a:t>
-            </a:r>
-          </a:p>
-          <a:p>
-            <a:r>
-              <a:rPr lang="en-US" dirty="0"/>
-              <a:t>Enables data versioning and future reprocessing.</a:t>
-            </a:r>
-          </a:p>
-          <a:p>
-            <a:br>
-              <a:rPr lang="en-US" dirty="0"/>
-            </a:br>
-            <a:endParaRPr lang="en-US" dirty="0"/>
-          </a:p>
-          <a:p>
-            <a:r>
-              <a:rPr lang="en-US" b="1" dirty="0"/>
-              <a:t>Query Layer</a:t>
-            </a:r>
-          </a:p>
-          <a:p>
-            <a:r>
-              <a:rPr lang="en-US" b="1" dirty="0"/>
-              <a:t>Amazon Athena</a:t>
-            </a:r>
-            <a:r>
-              <a:rPr lang="en-US" dirty="0"/>
-              <a:t> performs </a:t>
-            </a:r>
-            <a:r>
-              <a:rPr lang="en-US" b="1" dirty="0"/>
-              <a:t>SQL-based analytics</a:t>
-            </a:r>
-            <a:r>
-              <a:rPr lang="en-US" dirty="0"/>
-              <a:t> directly on S3 data (via the Glue Data Catalog).</a:t>
-            </a:r>
-          </a:p>
-          <a:p>
-            <a:r>
-              <a:rPr lang="en-US" dirty="0"/>
-              <a:t>Query results are stored back in S3 for further visualization or reporting.</a:t>
-            </a:r>
-          </a:p>
-          <a:p>
-            <a:br>
-              <a:rPr lang="en-US" dirty="0"/>
-            </a:br>
-            <a:endParaRPr lang="en-US" dirty="0"/>
-          </a:p>
-          <a:p>
-            <a:r>
-              <a:rPr lang="en-US" b="1" dirty="0"/>
-              <a:t> Monitoring Layer</a:t>
-            </a:r>
-          </a:p>
-          <a:p>
-            <a:r>
-              <a:rPr lang="en-US" b="1" dirty="0"/>
-              <a:t>Amazon CloudWatch</a:t>
-            </a:r>
-            <a:r>
-              <a:rPr lang="en-US" dirty="0"/>
-              <a:t> collects and visualizes:</a:t>
-            </a:r>
-          </a:p>
-          <a:p>
-            <a:pPr lvl="1"/>
-            <a:r>
-              <a:rPr lang="en-US" dirty="0"/>
-              <a:t>Stream metrics (from Kinesis)</a:t>
-            </a:r>
-          </a:p>
-          <a:p>
-            <a:pPr lvl="1"/>
-            <a:r>
-              <a:rPr lang="en-US" dirty="0"/>
-              <a:t>ETL job logs (from Glue)</a:t>
-            </a:r>
-          </a:p>
-          <a:p>
-            <a:pPr lvl="1"/>
-            <a:r>
-              <a:rPr lang="en-US" dirty="0"/>
-              <a:t>Operational alerts (failures, latency, etc.)</a:t>
-            </a:r>
-          </a:p>
-          <a:p>
-            <a:r>
-              <a:rPr lang="en-US" dirty="0"/>
-              <a:t>Ensures continuous visibility and debugging support.</a:t>
-            </a:r>
-          </a:p>
-          <a:p>
-            <a:br>
-              <a:rPr lang="en-US" dirty="0"/>
-            </a:br>
-            <a:endParaRPr lang="en-US" dirty="0"/>
-          </a:p>
-          <a:p>
-            <a:r>
-              <a:rPr lang="en-US" b="1" dirty="0"/>
-              <a:t>Key Benefits</a:t>
-            </a:r>
-          </a:p>
-          <a:p>
-            <a:r>
-              <a:rPr lang="en-US" dirty="0"/>
-              <a:t>Fully </a:t>
-            </a:r>
-            <a:r>
-              <a:rPr lang="en-US" b="1" dirty="0"/>
-              <a:t>Serverless</a:t>
-            </a:r>
-            <a:r>
-              <a:rPr lang="en-US" dirty="0"/>
-              <a:t> — no infrastructure management</a:t>
-            </a:r>
-          </a:p>
-          <a:p>
-            <a:r>
-              <a:rPr lang="en-US" b="1" dirty="0"/>
-              <a:t>Real-time</a:t>
-            </a:r>
-            <a:r>
-              <a:rPr lang="en-US" dirty="0"/>
-              <a:t> streaming and transformation</a:t>
-            </a:r>
-          </a:p>
-          <a:p>
-            <a:r>
-              <a:rPr lang="en-US" b="1" dirty="0"/>
-              <a:t>Schema automation</a:t>
-            </a:r>
-            <a:r>
-              <a:rPr lang="en-US" dirty="0"/>
-              <a:t> via Glue Crawler</a:t>
-            </a:r>
-          </a:p>
-          <a:p>
-            <a:r>
-              <a:rPr lang="en-US" b="1" dirty="0"/>
-              <a:t>Pay-per-query</a:t>
-            </a:r>
-            <a:r>
-              <a:rPr lang="en-US" dirty="0"/>
-              <a:t> analytics with Athena</a:t>
-            </a:r>
-          </a:p>
-          <a:p>
-            <a:r>
-              <a:rPr lang="en-US" b="1" dirty="0"/>
-              <a:t>End-to-end monitoring</a:t>
-            </a:r>
-            <a:r>
-              <a:rPr lang="en-US" dirty="0"/>
-              <a:t> with CloudWatch</a:t>
-            </a:r>
-          </a:p>
-          <a:p>
+              <a:t>Athena-used to query the processed data to obtain insights</a:t>
+            </a:r>
             <a:endParaRPr lang="en-US" dirty="0"/>
           </a:p>
         </p:txBody>
@@ -6893,7 +7001,7 @@
           <a:p>
             <a:fld id="{62CBD6A9-A395-44A7-B4A3-31518BFD952D}" type="datetimeFigureOut">
               <a:rPr lang="en-IN" smtClean="0"/>
-              <a:t>06-11-2025</a:t>
+              <a:t>08-11-2025</a:t>
             </a:fld>
             <a:endParaRPr lang="en-IN"/>
           </a:p>
@@ -7093,7 +7201,7 @@
           <a:p>
             <a:fld id="{62CBD6A9-A395-44A7-B4A3-31518BFD952D}" type="datetimeFigureOut">
               <a:rPr lang="en-IN" smtClean="0"/>
-              <a:t>06-11-2025</a:t>
+              <a:t>08-11-2025</a:t>
             </a:fld>
             <a:endParaRPr lang="en-IN"/>
           </a:p>
@@ -7303,7 +7411,7 @@
           <a:p>
             <a:fld id="{62CBD6A9-A395-44A7-B4A3-31518BFD952D}" type="datetimeFigureOut">
               <a:rPr lang="en-IN" smtClean="0"/>
-              <a:t>06-11-2025</a:t>
+              <a:t>08-11-2025</a:t>
             </a:fld>
             <a:endParaRPr lang="en-IN"/>
           </a:p>
@@ -7503,7 +7611,7 @@
           <a:p>
             <a:fld id="{62CBD6A9-A395-44A7-B4A3-31518BFD952D}" type="datetimeFigureOut">
               <a:rPr lang="en-IN" smtClean="0"/>
-              <a:t>06-11-2025</a:t>
+              <a:t>08-11-2025</a:t>
             </a:fld>
             <a:endParaRPr lang="en-IN"/>
           </a:p>
@@ -7779,7 +7887,7 @@
           <a:p>
             <a:fld id="{62CBD6A9-A395-44A7-B4A3-31518BFD952D}" type="datetimeFigureOut">
               <a:rPr lang="en-IN" smtClean="0"/>
-              <a:t>06-11-2025</a:t>
+              <a:t>08-11-2025</a:t>
             </a:fld>
             <a:endParaRPr lang="en-IN"/>
           </a:p>
@@ -8047,7 +8155,7 @@
           <a:p>
             <a:fld id="{62CBD6A9-A395-44A7-B4A3-31518BFD952D}" type="datetimeFigureOut">
               <a:rPr lang="en-IN" smtClean="0"/>
-              <a:t>06-11-2025</a:t>
+              <a:t>08-11-2025</a:t>
             </a:fld>
             <a:endParaRPr lang="en-IN"/>
           </a:p>
@@ -8462,7 +8570,7 @@
           <a:p>
             <a:fld id="{62CBD6A9-A395-44A7-B4A3-31518BFD952D}" type="datetimeFigureOut">
               <a:rPr lang="en-IN" smtClean="0"/>
-              <a:t>06-11-2025</a:t>
+              <a:t>08-11-2025</a:t>
             </a:fld>
             <a:endParaRPr lang="en-IN"/>
           </a:p>
@@ -8604,7 +8712,7 @@
           <a:p>
             <a:fld id="{62CBD6A9-A395-44A7-B4A3-31518BFD952D}" type="datetimeFigureOut">
               <a:rPr lang="en-IN" smtClean="0"/>
-              <a:t>06-11-2025</a:t>
+              <a:t>08-11-2025</a:t>
             </a:fld>
             <a:endParaRPr lang="en-IN"/>
           </a:p>
@@ -8717,7 +8825,7 @@
           <a:p>
             <a:fld id="{62CBD6A9-A395-44A7-B4A3-31518BFD952D}" type="datetimeFigureOut">
               <a:rPr lang="en-IN" smtClean="0"/>
-              <a:t>06-11-2025</a:t>
+              <a:t>08-11-2025</a:t>
             </a:fld>
             <a:endParaRPr lang="en-IN"/>
           </a:p>
@@ -9030,7 +9138,7 @@
           <a:p>
             <a:fld id="{62CBD6A9-A395-44A7-B4A3-31518BFD952D}" type="datetimeFigureOut">
               <a:rPr lang="en-IN" smtClean="0"/>
-              <a:t>06-11-2025</a:t>
+              <a:t>08-11-2025</a:t>
             </a:fld>
             <a:endParaRPr lang="en-IN"/>
           </a:p>
@@ -9319,7 +9427,7 @@
           <a:p>
             <a:fld id="{62CBD6A9-A395-44A7-B4A3-31518BFD952D}" type="datetimeFigureOut">
               <a:rPr lang="en-IN" smtClean="0"/>
-              <a:t>06-11-2025</a:t>
+              <a:t>08-11-2025</a:t>
             </a:fld>
             <a:endParaRPr lang="en-IN"/>
           </a:p>
@@ -9562,7 +9670,7 @@
           <a:p>
             <a:fld id="{62CBD6A9-A395-44A7-B4A3-31518BFD952D}" type="datetimeFigureOut">
               <a:rPr lang="en-IN" smtClean="0"/>
-              <a:t>06-11-2025</a:t>
+              <a:t>08-11-2025</a:t>
             </a:fld>
             <a:endParaRPr lang="en-IN"/>
           </a:p>
@@ -10077,12 +10185,8 @@
           <a:p>
             <a:pPr algn="l"/>
             <a:r>
-              <a:rPr lang="en-US" sz="6600"/>
-              <a:t>Telecom Signal </a:t>
-            </a:r>
-            <a:r>
               <a:rPr lang="en-US" sz="6600" dirty="0"/>
-              <a:t>Stream</a:t>
+              <a:t>Telecom Signal Stream</a:t>
             </a:r>
             <a:br>
               <a:rPr lang="en-US" sz="6600" dirty="0"/>
@@ -12241,38 +12345,6 @@
           </a:p>
         </p:txBody>
       </p:sp>
-      <p:pic>
-        <p:nvPicPr>
-          <p:cNvPr id="5" name="Content Placeholder 4">
-            <a:extLst>
-              <a:ext uri="{FF2B5EF4-FFF2-40B4-BE49-F238E27FC236}">
-                <a16:creationId xmlns:a16="http://schemas.microsoft.com/office/drawing/2014/main" id="{65EC3DD2-F8D5-A33C-E959-72D221DB7406}"/>
-              </a:ext>
-            </a:extLst>
-          </p:cNvPr>
-          <p:cNvPicPr>
-            <a:picLocks noGrp="1" noChangeAspect="1"/>
-          </p:cNvPicPr>
-          <p:nvPr>
-            <p:ph sz="half" idx="1"/>
-          </p:nvPr>
-        </p:nvPicPr>
-        <p:blipFill>
-          <a:blip r:embed="rId3"/>
-          <a:stretch>
-            <a:fillRect/>
-          </a:stretch>
-        </p:blipFill>
-        <p:spPr>
-          <a:xfrm>
-            <a:off x="658586" y="2141537"/>
-            <a:ext cx="4810609" cy="3900489"/>
-          </a:xfrm>
-          <a:prstGeom prst="rect">
-            <a:avLst/>
-          </a:prstGeom>
-        </p:spPr>
-      </p:pic>
       <p:sp>
         <p:nvSpPr>
           <p:cNvPr id="3" name="Content Placeholder 2">
@@ -12526,10 +12598,50 @@
       </p:sp>
       <p:pic>
         <p:nvPicPr>
-          <p:cNvPr id="7" name="Picture 6">
+          <p:cNvPr id="4" name="Picture 3">
             <a:extLst>
               <a:ext uri="{FF2B5EF4-FFF2-40B4-BE49-F238E27FC236}">
-                <a16:creationId xmlns:a16="http://schemas.microsoft.com/office/drawing/2014/main" id="{047BFB48-9931-D621-AB98-DF9793A3E87C}"/>
+                <a16:creationId xmlns:a16="http://schemas.microsoft.com/office/drawing/2014/main" id="{2779ECFB-87EB-1684-CD5F-917B3C8D782E}"/>
+              </a:ext>
+            </a:extLst>
+          </p:cNvPr>
+          <p:cNvPicPr>
+            <a:picLocks noChangeAspect="1"/>
+          </p:cNvPicPr>
+          <p:nvPr/>
+        </p:nvPicPr>
+        <p:blipFill>
+          <a:blip r:embed="rId3"/>
+          <a:stretch>
+            <a:fillRect/>
+          </a:stretch>
+        </p:blipFill>
+        <p:spPr>
+          <a:xfrm>
+            <a:off x="6246380" y="2279282"/>
+            <a:ext cx="4871045" cy="4026172"/>
+          </a:xfrm>
+          <a:prstGeom prst="rect">
+            <a:avLst/>
+          </a:prstGeom>
+          <a:ln>
+            <a:noFill/>
+          </a:ln>
+          <a:effectLst>
+            <a:outerShdw blurRad="292100" dist="139700" dir="2700000" algn="tl" rotWithShape="0">
+              <a:srgbClr val="333333">
+                <a:alpha val="65000"/>
+              </a:srgbClr>
+            </a:outerShdw>
+          </a:effectLst>
+        </p:spPr>
+      </p:pic>
+      <p:pic>
+        <p:nvPicPr>
+          <p:cNvPr id="21" name="Picture 20">
+            <a:extLst>
+              <a:ext uri="{FF2B5EF4-FFF2-40B4-BE49-F238E27FC236}">
+                <a16:creationId xmlns:a16="http://schemas.microsoft.com/office/drawing/2014/main" id="{16678153-7A3C-4D20-17DB-944F22A0CAD3}"/>
               </a:ext>
             </a:extLst>
           </p:cNvPr>
@@ -12546,312 +12658,22 @@
         </p:blipFill>
         <p:spPr>
           <a:xfrm>
-            <a:off x="6247623" y="2141537"/>
-            <a:ext cx="5474577" cy="3641568"/>
+            <a:off x="748005" y="2279281"/>
+            <a:ext cx="4784115" cy="4026172"/>
           </a:xfrm>
           <a:prstGeom prst="rect">
             <a:avLst/>
           </a:prstGeom>
-        </p:spPr>
-      </p:pic>
-      <p:pic>
-        <p:nvPicPr>
-          <p:cNvPr id="8" name="Picture 7">
-            <a:extLst>
-              <a:ext uri="{FF2B5EF4-FFF2-40B4-BE49-F238E27FC236}">
-                <a16:creationId xmlns:a16="http://schemas.microsoft.com/office/drawing/2014/main" id="{E2A39638-32A9-0361-55EA-3C6BE5548CCE}"/>
-              </a:ext>
-            </a:extLst>
-          </p:cNvPr>
-          <p:cNvPicPr>
-            <a:picLocks noChangeAspect="1"/>
-          </p:cNvPicPr>
-          <p:nvPr/>
-        </p:nvPicPr>
-        <p:blipFill>
-          <a:blip r:embed="rId5"/>
-          <a:stretch>
-            <a:fillRect/>
-          </a:stretch>
-        </p:blipFill>
-        <p:spPr>
-          <a:xfrm flipH="1">
-            <a:off x="7314179" y="2560320"/>
-            <a:ext cx="220475" cy="166560"/>
-          </a:xfrm>
-          <a:prstGeom prst="rect">
-            <a:avLst/>
-          </a:prstGeom>
-        </p:spPr>
-      </p:pic>
-      <p:pic>
-        <p:nvPicPr>
-          <p:cNvPr id="9" name="Picture 8">
-            <a:extLst>
-              <a:ext uri="{FF2B5EF4-FFF2-40B4-BE49-F238E27FC236}">
-                <a16:creationId xmlns:a16="http://schemas.microsoft.com/office/drawing/2014/main" id="{66F32B51-975D-4A25-4AD4-91FB40BD1DBD}"/>
-              </a:ext>
-            </a:extLst>
-          </p:cNvPr>
-          <p:cNvPicPr>
-            <a:picLocks noChangeAspect="1"/>
-          </p:cNvPicPr>
-          <p:nvPr/>
-        </p:nvPicPr>
-        <p:blipFill>
-          <a:blip r:embed="rId5"/>
-          <a:stretch>
-            <a:fillRect/>
-          </a:stretch>
-        </p:blipFill>
-        <p:spPr>
-          <a:xfrm flipH="1">
-            <a:off x="7320275" y="2890299"/>
-            <a:ext cx="220475" cy="166560"/>
-          </a:xfrm>
-          <a:prstGeom prst="rect">
-            <a:avLst/>
-          </a:prstGeom>
-        </p:spPr>
-      </p:pic>
-      <p:pic>
-        <p:nvPicPr>
-          <p:cNvPr id="10" name="Picture 9">
-            <a:extLst>
-              <a:ext uri="{FF2B5EF4-FFF2-40B4-BE49-F238E27FC236}">
-                <a16:creationId xmlns:a16="http://schemas.microsoft.com/office/drawing/2014/main" id="{F68D0794-E560-A53F-EF78-FA075227B7EC}"/>
-              </a:ext>
-            </a:extLst>
-          </p:cNvPr>
-          <p:cNvPicPr>
-            <a:picLocks noChangeAspect="1"/>
-          </p:cNvPicPr>
-          <p:nvPr/>
-        </p:nvPicPr>
-        <p:blipFill>
-          <a:blip r:embed="rId5"/>
-          <a:stretch>
-            <a:fillRect/>
-          </a:stretch>
-        </p:blipFill>
-        <p:spPr>
-          <a:xfrm flipH="1">
-            <a:off x="7326371" y="3224784"/>
-            <a:ext cx="220475" cy="166560"/>
-          </a:xfrm>
-          <a:prstGeom prst="rect">
-            <a:avLst/>
-          </a:prstGeom>
-        </p:spPr>
-      </p:pic>
-      <p:pic>
-        <p:nvPicPr>
-          <p:cNvPr id="11" name="Picture 10">
-            <a:extLst>
-              <a:ext uri="{FF2B5EF4-FFF2-40B4-BE49-F238E27FC236}">
-                <a16:creationId xmlns:a16="http://schemas.microsoft.com/office/drawing/2014/main" id="{B9382989-7579-207E-CFFE-305313E48C1D}"/>
-              </a:ext>
-            </a:extLst>
-          </p:cNvPr>
-          <p:cNvPicPr>
-            <a:picLocks noChangeAspect="1"/>
-          </p:cNvPicPr>
-          <p:nvPr/>
-        </p:nvPicPr>
-        <p:blipFill>
-          <a:blip r:embed="rId5"/>
-          <a:stretch>
-            <a:fillRect/>
-          </a:stretch>
-        </p:blipFill>
-        <p:spPr>
-          <a:xfrm flipH="1">
-            <a:off x="7326371" y="3553968"/>
-            <a:ext cx="220475" cy="166560"/>
-          </a:xfrm>
-          <a:prstGeom prst="rect">
-            <a:avLst/>
-          </a:prstGeom>
-        </p:spPr>
-      </p:pic>
-      <p:pic>
-        <p:nvPicPr>
-          <p:cNvPr id="12" name="Picture 11">
-            <a:extLst>
-              <a:ext uri="{FF2B5EF4-FFF2-40B4-BE49-F238E27FC236}">
-                <a16:creationId xmlns:a16="http://schemas.microsoft.com/office/drawing/2014/main" id="{4B135977-3465-99DC-1B8F-BE537C765073}"/>
-              </a:ext>
-            </a:extLst>
-          </p:cNvPr>
-          <p:cNvPicPr>
-            <a:picLocks noChangeAspect="1"/>
-          </p:cNvPicPr>
-          <p:nvPr/>
-        </p:nvPicPr>
-        <p:blipFill>
-          <a:blip r:embed="rId5"/>
-          <a:stretch>
-            <a:fillRect/>
-          </a:stretch>
-        </p:blipFill>
-        <p:spPr>
-          <a:xfrm flipH="1">
-            <a:off x="7326371" y="3883152"/>
-            <a:ext cx="220475" cy="166560"/>
-          </a:xfrm>
-          <a:prstGeom prst="rect">
-            <a:avLst/>
-          </a:prstGeom>
-        </p:spPr>
-      </p:pic>
-      <p:pic>
-        <p:nvPicPr>
-          <p:cNvPr id="13" name="Picture 12">
-            <a:extLst>
-              <a:ext uri="{FF2B5EF4-FFF2-40B4-BE49-F238E27FC236}">
-                <a16:creationId xmlns:a16="http://schemas.microsoft.com/office/drawing/2014/main" id="{8E104611-7D7E-3CC3-7F61-D25D1D8AAB07}"/>
-              </a:ext>
-            </a:extLst>
-          </p:cNvPr>
-          <p:cNvPicPr>
-            <a:picLocks noChangeAspect="1"/>
-          </p:cNvPicPr>
-          <p:nvPr/>
-        </p:nvPicPr>
-        <p:blipFill>
-          <a:blip r:embed="rId5"/>
-          <a:stretch>
-            <a:fillRect/>
-          </a:stretch>
-        </p:blipFill>
-        <p:spPr>
-          <a:xfrm flipH="1">
-            <a:off x="7326371" y="4218432"/>
-            <a:ext cx="220475" cy="166560"/>
-          </a:xfrm>
-          <a:prstGeom prst="rect">
-            <a:avLst/>
-          </a:prstGeom>
-        </p:spPr>
-      </p:pic>
-      <p:pic>
-        <p:nvPicPr>
-          <p:cNvPr id="14" name="Picture 13">
-            <a:extLst>
-              <a:ext uri="{FF2B5EF4-FFF2-40B4-BE49-F238E27FC236}">
-                <a16:creationId xmlns:a16="http://schemas.microsoft.com/office/drawing/2014/main" id="{B47A44D5-10E8-4660-919B-670B8A392253}"/>
-              </a:ext>
-            </a:extLst>
-          </p:cNvPr>
-          <p:cNvPicPr>
-            <a:picLocks noChangeAspect="1"/>
-          </p:cNvPicPr>
-          <p:nvPr/>
-        </p:nvPicPr>
-        <p:blipFill>
-          <a:blip r:embed="rId5"/>
-          <a:stretch>
-            <a:fillRect/>
-          </a:stretch>
-        </p:blipFill>
-        <p:spPr>
-          <a:xfrm flipH="1">
-            <a:off x="7326371" y="4553712"/>
-            <a:ext cx="220475" cy="166560"/>
-          </a:xfrm>
-          <a:prstGeom prst="rect">
-            <a:avLst/>
-          </a:prstGeom>
-        </p:spPr>
-      </p:pic>
-      <p:pic>
-        <p:nvPicPr>
-          <p:cNvPr id="15" name="Picture 14">
-            <a:extLst>
-              <a:ext uri="{FF2B5EF4-FFF2-40B4-BE49-F238E27FC236}">
-                <a16:creationId xmlns:a16="http://schemas.microsoft.com/office/drawing/2014/main" id="{A5BCFB94-A579-FA3C-4839-0207F3A42B5A}"/>
-              </a:ext>
-            </a:extLst>
-          </p:cNvPr>
-          <p:cNvPicPr>
-            <a:picLocks noChangeAspect="1"/>
-          </p:cNvPicPr>
-          <p:nvPr/>
-        </p:nvPicPr>
-        <p:blipFill>
-          <a:blip r:embed="rId5"/>
-          <a:stretch>
-            <a:fillRect/>
-          </a:stretch>
-        </p:blipFill>
-        <p:spPr>
-          <a:xfrm flipH="1">
-            <a:off x="7326371" y="4888992"/>
-            <a:ext cx="220475" cy="166560"/>
-          </a:xfrm>
-          <a:prstGeom prst="rect">
-            <a:avLst/>
-          </a:prstGeom>
-        </p:spPr>
-      </p:pic>
-      <p:pic>
-        <p:nvPicPr>
-          <p:cNvPr id="16" name="Picture 15">
-            <a:extLst>
-              <a:ext uri="{FF2B5EF4-FFF2-40B4-BE49-F238E27FC236}">
-                <a16:creationId xmlns:a16="http://schemas.microsoft.com/office/drawing/2014/main" id="{07A0F8C7-F474-8393-20B6-482A4FCAA842}"/>
-              </a:ext>
-            </a:extLst>
-          </p:cNvPr>
-          <p:cNvPicPr>
-            <a:picLocks noChangeAspect="1"/>
-          </p:cNvPicPr>
-          <p:nvPr/>
-        </p:nvPicPr>
-        <p:blipFill>
-          <a:blip r:embed="rId5"/>
-          <a:stretch>
-            <a:fillRect/>
-          </a:stretch>
-        </p:blipFill>
-        <p:spPr>
-          <a:xfrm flipH="1">
-            <a:off x="7326371" y="5224272"/>
-            <a:ext cx="220475" cy="166560"/>
-          </a:xfrm>
-          <a:prstGeom prst="rect">
-            <a:avLst/>
-          </a:prstGeom>
-        </p:spPr>
-      </p:pic>
-      <p:pic>
-        <p:nvPicPr>
-          <p:cNvPr id="17" name="Picture 16">
-            <a:extLst>
-              <a:ext uri="{FF2B5EF4-FFF2-40B4-BE49-F238E27FC236}">
-                <a16:creationId xmlns:a16="http://schemas.microsoft.com/office/drawing/2014/main" id="{FDF91A9C-096E-AEEF-FB11-438CE143FCBA}"/>
-              </a:ext>
-            </a:extLst>
-          </p:cNvPr>
-          <p:cNvPicPr>
-            <a:picLocks noChangeAspect="1"/>
-          </p:cNvPicPr>
-          <p:nvPr/>
-        </p:nvPicPr>
-        <p:blipFill>
-          <a:blip r:embed="rId5"/>
-          <a:stretch>
-            <a:fillRect/>
-          </a:stretch>
-        </p:blipFill>
-        <p:spPr>
-          <a:xfrm flipH="1">
-            <a:off x="7320275" y="5553456"/>
-            <a:ext cx="220475" cy="166560"/>
-          </a:xfrm>
-          <a:prstGeom prst="rect">
-            <a:avLst/>
-          </a:prstGeom>
+          <a:ln>
+            <a:noFill/>
+          </a:ln>
+          <a:effectLst>
+            <a:outerShdw blurRad="292100" dist="139700" dir="2700000" algn="tl" rotWithShape="0">
+              <a:srgbClr val="333333">
+                <a:alpha val="65000"/>
+              </a:srgbClr>
+            </a:outerShdw>
+          </a:effectLst>
         </p:spPr>
       </p:pic>
     </p:spTree>
@@ -13165,19 +12987,17 @@
       </p:sp>
       <p:pic>
         <p:nvPicPr>
-          <p:cNvPr id="9" name="Content Placeholder 8">
+          <p:cNvPr id="8" name="Picture 7">
             <a:extLst>
               <a:ext uri="{FF2B5EF4-FFF2-40B4-BE49-F238E27FC236}">
-                <a16:creationId xmlns:a16="http://schemas.microsoft.com/office/drawing/2014/main" id="{45BE9DB0-56EB-F8DD-2A68-35B84D8F5248}"/>
+                <a16:creationId xmlns:a16="http://schemas.microsoft.com/office/drawing/2014/main" id="{412E2512-CB41-2487-D269-DEAAC7BC9800}"/>
               </a:ext>
             </a:extLst>
           </p:cNvPr>
           <p:cNvPicPr>
-            <a:picLocks noGrp="1" noChangeAspect="1"/>
+            <a:picLocks noChangeAspect="1"/>
           </p:cNvPicPr>
-          <p:nvPr>
-            <p:ph sz="half" idx="1"/>
-          </p:nvPr>
+          <p:nvPr/>
         </p:nvPicPr>
         <p:blipFill>
           <a:blip r:embed="rId3"/>
@@ -13187,8 +13007,8 @@
         </p:blipFill>
         <p:spPr>
           <a:xfrm>
-            <a:off x="838200" y="2220686"/>
-            <a:ext cx="4956110" cy="3821340"/>
+            <a:off x="2995581" y="2547373"/>
+            <a:ext cx="147669" cy="3424168"/>
           </a:xfrm>
           <a:prstGeom prst="rect">
             <a:avLst/>
@@ -13197,10 +13017,10 @@
       </p:pic>
       <p:pic>
         <p:nvPicPr>
-          <p:cNvPr id="10" name="Picture 9">
+          <p:cNvPr id="15" name="Picture 14">
             <a:extLst>
               <a:ext uri="{FF2B5EF4-FFF2-40B4-BE49-F238E27FC236}">
-                <a16:creationId xmlns:a16="http://schemas.microsoft.com/office/drawing/2014/main" id="{9E3FE195-6246-1CE0-51CD-0C200AE346EE}"/>
+                <a16:creationId xmlns:a16="http://schemas.microsoft.com/office/drawing/2014/main" id="{E7D25687-8183-C3D5-2650-CD533338DAA5}"/>
               </a:ext>
             </a:extLst>
           </p:cNvPr>
@@ -13211,27 +13031,36 @@
         </p:nvPicPr>
         <p:blipFill>
           <a:blip r:embed="rId4"/>
-          <a:srcRect r="19197"/>
           <a:stretch>
             <a:fillRect/>
           </a:stretch>
         </p:blipFill>
         <p:spPr>
           <a:xfrm>
-            <a:off x="6215743" y="2220686"/>
-            <a:ext cx="4822371" cy="3821340"/>
+            <a:off x="670289" y="2250919"/>
+            <a:ext cx="5029161" cy="4017076"/>
           </a:xfrm>
           <a:prstGeom prst="rect">
             <a:avLst/>
           </a:prstGeom>
+          <a:ln>
+            <a:noFill/>
+          </a:ln>
+          <a:effectLst>
+            <a:outerShdw blurRad="292100" dist="139700" dir="2700000" algn="tl" rotWithShape="0">
+              <a:srgbClr val="333333">
+                <a:alpha val="65000"/>
+              </a:srgbClr>
+            </a:outerShdw>
+          </a:effectLst>
         </p:spPr>
       </p:pic>
       <p:pic>
         <p:nvPicPr>
-          <p:cNvPr id="8" name="Picture 7">
+          <p:cNvPr id="19" name="Picture 18">
             <a:extLst>
               <a:ext uri="{FF2B5EF4-FFF2-40B4-BE49-F238E27FC236}">
-                <a16:creationId xmlns:a16="http://schemas.microsoft.com/office/drawing/2014/main" id="{412E2512-CB41-2487-D269-DEAAC7BC9800}"/>
+                <a16:creationId xmlns:a16="http://schemas.microsoft.com/office/drawing/2014/main" id="{CC4ABAD3-ECD5-05FD-6202-4996D87E4C46}"/>
               </a:ext>
             </a:extLst>
           </p:cNvPr>
@@ -13248,12 +13077,22 @@
         </p:blipFill>
         <p:spPr>
           <a:xfrm>
-            <a:off x="2995581" y="2547373"/>
-            <a:ext cx="147669" cy="3424168"/>
+            <a:off x="6054013" y="2250919"/>
+            <a:ext cx="5181600" cy="4017075"/>
           </a:xfrm>
           <a:prstGeom prst="rect">
             <a:avLst/>
           </a:prstGeom>
+          <a:ln>
+            <a:noFill/>
+          </a:ln>
+          <a:effectLst>
+            <a:outerShdw blurRad="292100" dist="139700" dir="2700000" algn="tl" rotWithShape="0">
+              <a:srgbClr val="333333">
+                <a:alpha val="65000"/>
+              </a:srgbClr>
+            </a:outerShdw>
+          </a:effectLst>
         </p:spPr>
       </p:pic>
     </p:spTree>
@@ -15843,6 +15682,16 @@
           <a:prstGeom prst="rect">
             <a:avLst/>
           </a:prstGeom>
+          <a:ln>
+            <a:noFill/>
+          </a:ln>
+          <a:effectLst>
+            <a:outerShdw blurRad="292100" dist="139700" dir="2700000" algn="tl" rotWithShape="0">
+              <a:srgbClr val="333333">
+                <a:alpha val="65000"/>
+              </a:srgbClr>
+            </a:outerShdw>
+          </a:effectLst>
         </p:spPr>
       </p:pic>
     </p:spTree>
@@ -16128,33 +15977,25 @@
           <a:p>
             <a:r>
               <a:rPr lang="en-IN" sz="2000" dirty="0"/>
-              <a:t>Real-time data availability : Incoming mobile log data instantly processed and stored in S3.</a:t>
+              <a:t>Real-time data availability </a:t>
             </a:r>
           </a:p>
           <a:p>
             <a:r>
               <a:rPr lang="en-IN" sz="2000" dirty="0"/>
-              <a:t>Clean &amp; structured datasets : JSON stream transformed into timestamped, analytics-ready CSV files.</a:t>
+              <a:t>Clean and structured datasets</a:t>
             </a:r>
           </a:p>
           <a:p>
             <a:r>
               <a:rPr lang="en-IN" sz="2000" dirty="0"/>
-              <a:t>Faster insights : Teams can query live data using Amazon Athena without manual ETL steps.</a:t>
+              <a:t>Faster insights</a:t>
             </a:r>
           </a:p>
           <a:p>
             <a:r>
               <a:rPr lang="en-IN" sz="2000" dirty="0"/>
-              <a:t>Scalable foundation : The pipeline can easily integrate new data sources or analytics dashboards (</a:t>
-            </a:r>
-            <a:r>
-              <a:rPr lang="en-IN" sz="2000" dirty="0" err="1"/>
-              <a:t>QuickSight</a:t>
-            </a:r>
-            <a:r>
-              <a:rPr lang="en-IN" sz="2000" dirty="0"/>
-              <a:t>, Power BI).</a:t>
+              <a:t>Scalable foundation</a:t>
             </a:r>
           </a:p>
         </p:txBody>
@@ -17229,7 +17070,7 @@
             </a:pPr>
             <a:r>
               <a:rPr lang="en-US" sz="2200" dirty="0"/>
-              <a:t>AWS Data Pipeline Design : Learned how to build a real-time data pipeline connecting Kinesis Data Stream → AWS Glue → S3 → Athena for end-to-end data processing.</a:t>
+              <a:t>AWS Data Pipeline Design </a:t>
             </a:r>
           </a:p>
           <a:p>
@@ -17239,13 +17080,8 @@
             </a:pPr>
             <a:r>
               <a:rPr lang="en-US" sz="2200" dirty="0"/>
-              <a:t>Spark Structured Streaming : Gained hands-on experience with reading continuous streams and </a:t>
-            </a:r>
-            <a:r>
-              <a:rPr lang="en-US" sz="2200"/>
-              <a:t>writing results.</a:t>
-            </a:r>
-            <a:endParaRPr lang="en-US" sz="2200" dirty="0"/>
+              <a:t>Spark Structured </a:t>
+            </a:r>
           </a:p>
           <a:p>
             <a:pPr marL="342900" indent="-342900">
@@ -17254,7 +17090,7 @@
             </a:pPr>
             <a:r>
               <a:rPr lang="en-IN" sz="2200" dirty="0"/>
-              <a:t>Schema Handling &amp; Data Transformation : Practiced defining JSON schemas, parsing dynamic data, and transforming raw data into structured CSV output.</a:t>
+              <a:t>Schema Handling and Data </a:t>
             </a:r>
           </a:p>
           <a:p>
@@ -17264,7 +17100,7 @@
             </a:pPr>
             <a:r>
               <a:rPr lang="en-US" sz="2200" dirty="0"/>
-              <a:t>Offline Testing &amp; Local Simulation : Developed a local test setup using Docker + Spark to simulate streaming with JSON files before deploying to AWS. </a:t>
+              <a:t>Offline Testing and Local Simulation</a:t>
             </a:r>
           </a:p>
           <a:p>
@@ -17274,10 +17110,8 @@
             </a:pPr>
             <a:r>
               <a:rPr lang="en-US" sz="2200" dirty="0"/>
-              <a:t>AWS Cloud Integration : Explored Glue Catalog, Athena, and S3 as a seamless ecosystem for data storage, querying, and analytics.</a:t>
-            </a:r>
-          </a:p>
-          <a:p>
+              <a:t>AWS Cloud Integration</a:t>
+            </a:r>
             <a:endParaRPr lang="en-IN" sz="2200" dirty="0"/>
           </a:p>
         </p:txBody>
@@ -17354,6 +17188,11 @@
           </p:cNvGraphicFramePr>
           <p:nvPr>
             <p:ph idx="1"/>
+            <p:extLst>
+              <p:ext uri="{D42A27DB-BD31-4B8C-83A1-F6EECF244321}">
+                <p14:modId xmlns:p14="http://schemas.microsoft.com/office/powerpoint/2010/main" val="3704695818"/>
+              </p:ext>
+            </p:extLst>
           </p:nvPr>
         </p:nvGraphicFramePr>
         <p:xfrm>
@@ -18352,25 +18191,25 @@
           <a:p>
             <a:r>
               <a:rPr lang="en-IN" dirty="0"/>
-              <a:t>Ijaz Ahmad S</a:t>
+              <a:t>Kavya Bhatta S</a:t>
             </a:r>
           </a:p>
           <a:p>
             <a:r>
               <a:rPr lang="en-IN" dirty="0"/>
-              <a:t>Kavya Bhatta S</a:t>
+              <a:t>Sahana J Upadhyaya</a:t>
             </a:r>
           </a:p>
           <a:p>
             <a:r>
               <a:rPr lang="en-IN" dirty="0"/>
-              <a:t>Rakesh Kumar    </a:t>
+              <a:t>Rakesh Kumar  </a:t>
             </a:r>
           </a:p>
           <a:p>
             <a:r>
               <a:rPr lang="en-IN" dirty="0"/>
-              <a:t>Sahana J Upadhyaya    </a:t>
+              <a:t>Ijaz Ahmad S      </a:t>
             </a:r>
           </a:p>
           <a:p>
@@ -20253,11 +20092,10 @@
             </a:r>
           </a:p>
           <a:p>
-            <a:pPr lvl="1"/>
-            <a:r>
-              <a:rPr lang="en-IN" sz="1600" dirty="0"/>
-              <a:t>Streaming Data</a:t>
-            </a:r>
+            <a:pPr marL="457200" lvl="1" indent="0">
+              <a:buNone/>
+            </a:pPr>
+            <a:endParaRPr lang="en-IN" sz="1600" dirty="0"/>
           </a:p>
           <a:p>
             <a:pPr lvl="1"/>
@@ -22650,14 +22488,14 @@
             <p:ph idx="1"/>
             <p:extLst>
               <p:ext uri="{D42A27DB-BD31-4B8C-83A1-F6EECF244321}">
-                <p14:modId xmlns:p14="http://schemas.microsoft.com/office/powerpoint/2010/main" val="1361805104"/>
+                <p14:modId xmlns:p14="http://schemas.microsoft.com/office/powerpoint/2010/main" val="2784889880"/>
               </p:ext>
             </p:extLst>
           </p:nvPr>
         </p:nvGraphicFramePr>
         <p:xfrm>
           <a:off x="838200" y="1898174"/>
-          <a:ext cx="10515600" cy="4206240"/>
+          <a:ext cx="10515600" cy="3566160"/>
         </p:xfrm>
         <a:graphic>
           <a:graphicData uri="http://schemas.openxmlformats.org/drawingml/2006/table">
@@ -23163,7 +23001,7 @@
                       </a:pPr>
                       <a:r>
                         <a:rPr lang="en-IN" b="1" dirty="0"/>
-                        <a:t>AWS IAM</a:t>
+                        <a:t>Amazon Athena</a:t>
                       </a:r>
                       <a:endParaRPr lang="en-IN" dirty="0"/>
                     </a:p>
@@ -23218,122 +23056,6 @@
                       </a:pPr>
                       <a:r>
                         <a:rPr lang="en-US" dirty="0"/>
-                        <a:t>Provides roles and permissions for Glue, Kinesis, and S3 access control.</a:t>
-                      </a:r>
-                    </a:p>
-                  </a:txBody>
-                  <a:tcPr anchor="ctr">
-                    <a:lnL w="12700" cap="flat" cmpd="sng" algn="ctr">
-                      <a:solidFill>
-                        <a:schemeClr val="tx1"/>
-                      </a:solidFill>
-                      <a:prstDash val="solid"/>
-                      <a:round/>
-                      <a:headEnd type="none" w="med" len="med"/>
-                      <a:tailEnd type="none" w="med" len="med"/>
-                    </a:lnL>
-                    <a:lnR w="12700" cap="flat" cmpd="sng" algn="ctr">
-                      <a:solidFill>
-                        <a:schemeClr val="tx1"/>
-                      </a:solidFill>
-                      <a:prstDash val="solid"/>
-                      <a:round/>
-                      <a:headEnd type="none" w="med" len="med"/>
-                      <a:tailEnd type="none" w="med" len="med"/>
-                    </a:lnR>
-                    <a:lnT w="12700" cap="flat" cmpd="sng" algn="ctr">
-                      <a:solidFill>
-                        <a:schemeClr val="tx1"/>
-                      </a:solidFill>
-                      <a:prstDash val="solid"/>
-                      <a:round/>
-                      <a:headEnd type="none" w="med" len="med"/>
-                      <a:tailEnd type="none" w="med" len="med"/>
-                    </a:lnT>
-                    <a:lnB w="12700" cap="flat" cmpd="sng" algn="ctr">
-                      <a:solidFill>
-                        <a:schemeClr val="tx1"/>
-                      </a:solidFill>
-                      <a:prstDash val="solid"/>
-                      <a:round/>
-                      <a:headEnd type="none" w="med" len="med"/>
-                      <a:tailEnd type="none" w="med" len="med"/>
-                    </a:lnB>
-                    <a:noFill/>
-                  </a:tcPr>
-                </a:tc>
-                <a:extLst>
-                  <a:ext uri="{0D108BD9-81ED-4DB2-BD59-A6C34878D82A}">
-                    <a16:rowId xmlns:a16="http://schemas.microsoft.com/office/drawing/2014/main" val="3315892023"/>
-                  </a:ext>
-                </a:extLst>
-              </a:tr>
-              <a:tr h="636438">
-                <a:tc>
-                  <a:txBody>
-                    <a:bodyPr/>
-                    <a:lstStyle/>
-                    <a:p>
-                      <a:pPr>
-                        <a:buNone/>
-                      </a:pPr>
-                      <a:r>
-                        <a:rPr lang="en-IN" b="1"/>
-                        <a:t>Amazon Athena</a:t>
-                      </a:r>
-                      <a:endParaRPr lang="en-IN"/>
-                    </a:p>
-                  </a:txBody>
-                  <a:tcPr anchor="ctr">
-                    <a:lnL w="12700" cap="flat" cmpd="sng" algn="ctr">
-                      <a:solidFill>
-                        <a:schemeClr val="tx1"/>
-                      </a:solidFill>
-                      <a:prstDash val="solid"/>
-                      <a:round/>
-                      <a:headEnd type="none" w="med" len="med"/>
-                      <a:tailEnd type="none" w="med" len="med"/>
-                    </a:lnL>
-                    <a:lnR w="12700" cap="flat" cmpd="sng" algn="ctr">
-                      <a:solidFill>
-                        <a:schemeClr val="tx1"/>
-                      </a:solidFill>
-                      <a:prstDash val="solid"/>
-                      <a:round/>
-                      <a:headEnd type="none" w="med" len="med"/>
-                      <a:tailEnd type="none" w="med" len="med"/>
-                    </a:lnR>
-                    <a:lnT w="12700" cap="flat" cmpd="sng" algn="ctr">
-                      <a:solidFill>
-                        <a:schemeClr val="tx1"/>
-                      </a:solidFill>
-                      <a:prstDash val="solid"/>
-                      <a:round/>
-                      <a:headEnd type="none" w="med" len="med"/>
-                      <a:tailEnd type="none" w="med" len="med"/>
-                    </a:lnT>
-                    <a:lnB w="12700" cap="flat" cmpd="sng" algn="ctr">
-                      <a:solidFill>
-                        <a:schemeClr val="tx1"/>
-                      </a:solidFill>
-                      <a:prstDash val="solid"/>
-                      <a:round/>
-                      <a:headEnd type="none" w="med" len="med"/>
-                      <a:tailEnd type="none" w="med" len="med"/>
-                    </a:lnB>
-                    <a:noFill/>
-                  </a:tcPr>
-                </a:tc>
-                <a:tc>
-                  <a:txBody>
-                    <a:bodyPr/>
-                    <a:lstStyle/>
-                    <a:p>
-                      <a:pPr>
-                        <a:buNone/>
-                      </a:pPr>
-                      <a:r>
-                        <a:rPr lang="en-US"/>
                         <a:t>Serverless query engine to analyze processed data stored in S3 using SQL.</a:t>
                       </a:r>
                     </a:p>
@@ -23562,7 +23284,7 @@
           <a:p>
             <a:r>
               <a:rPr lang="en-IN" dirty="0"/>
-              <a:t>Detailed Pipeline Flow</a:t>
+              <a:t>Detailed Data Flow</a:t>
             </a:r>
           </a:p>
         </p:txBody>
@@ -23597,6 +23319,156 @@
           <a:xfrm>
             <a:off x="11575" y="2170600"/>
             <a:ext cx="12192000" cy="3489420"/>
+          </a:xfrm>
+          <a:prstGeom prst="rect">
+            <a:avLst/>
+          </a:prstGeom>
+        </p:spPr>
+      </p:pic>
+      <p:pic>
+        <p:nvPicPr>
+          <p:cNvPr id="4" name="Picture 3">
+            <a:extLst>
+              <a:ext uri="{FF2B5EF4-FFF2-40B4-BE49-F238E27FC236}">
+                <a16:creationId xmlns:a16="http://schemas.microsoft.com/office/drawing/2014/main" id="{FB0E4384-977C-8E2E-54D2-39BE8BBB3F63}"/>
+              </a:ext>
+            </a:extLst>
+          </p:cNvPr>
+          <p:cNvPicPr>
+            <a:picLocks noChangeAspect="1"/>
+          </p:cNvPicPr>
+          <p:nvPr/>
+        </p:nvPicPr>
+        <p:blipFill>
+          <a:blip r:embed="rId4"/>
+          <a:stretch>
+            <a:fillRect/>
+          </a:stretch>
+        </p:blipFill>
+        <p:spPr>
+          <a:xfrm>
+            <a:off x="2715208" y="3849993"/>
+            <a:ext cx="9488367" cy="2195513"/>
+          </a:xfrm>
+          <a:prstGeom prst="rect">
+            <a:avLst/>
+          </a:prstGeom>
+        </p:spPr>
+      </p:pic>
+      <p:pic>
+        <p:nvPicPr>
+          <p:cNvPr id="6" name="Picture 5">
+            <a:extLst>
+              <a:ext uri="{FF2B5EF4-FFF2-40B4-BE49-F238E27FC236}">
+                <a16:creationId xmlns:a16="http://schemas.microsoft.com/office/drawing/2014/main" id="{0EE77854-66FC-5474-22C0-EDC057EC1A30}"/>
+              </a:ext>
+            </a:extLst>
+          </p:cNvPr>
+          <p:cNvPicPr>
+            <a:picLocks noChangeAspect="1"/>
+          </p:cNvPicPr>
+          <p:nvPr/>
+        </p:nvPicPr>
+        <p:blipFill>
+          <a:blip r:embed="rId5"/>
+          <a:stretch>
+            <a:fillRect/>
+          </a:stretch>
+        </p:blipFill>
+        <p:spPr>
+          <a:xfrm>
+            <a:off x="3610952" y="3732234"/>
+            <a:ext cx="307910" cy="355116"/>
+          </a:xfrm>
+          <a:prstGeom prst="rect">
+            <a:avLst/>
+          </a:prstGeom>
+        </p:spPr>
+      </p:pic>
+      <p:pic>
+        <p:nvPicPr>
+          <p:cNvPr id="7" name="Picture 6">
+            <a:extLst>
+              <a:ext uri="{FF2B5EF4-FFF2-40B4-BE49-F238E27FC236}">
+                <a16:creationId xmlns:a16="http://schemas.microsoft.com/office/drawing/2014/main" id="{F161E58F-409B-067A-89A0-A0595011277B}"/>
+              </a:ext>
+            </a:extLst>
+          </p:cNvPr>
+          <p:cNvPicPr>
+            <a:picLocks noChangeAspect="1"/>
+          </p:cNvPicPr>
+          <p:nvPr/>
+        </p:nvPicPr>
+        <p:blipFill>
+          <a:blip r:embed="rId5"/>
+          <a:stretch>
+            <a:fillRect/>
+          </a:stretch>
+        </p:blipFill>
+        <p:spPr>
+          <a:xfrm>
+            <a:off x="5872073" y="3707349"/>
+            <a:ext cx="307910" cy="355116"/>
+          </a:xfrm>
+          <a:prstGeom prst="rect">
+            <a:avLst/>
+          </a:prstGeom>
+        </p:spPr>
+      </p:pic>
+      <p:pic>
+        <p:nvPicPr>
+          <p:cNvPr id="8" name="Picture 7">
+            <a:extLst>
+              <a:ext uri="{FF2B5EF4-FFF2-40B4-BE49-F238E27FC236}">
+                <a16:creationId xmlns:a16="http://schemas.microsoft.com/office/drawing/2014/main" id="{FADF7805-5BFE-22C6-A853-488A828C4B2F}"/>
+              </a:ext>
+            </a:extLst>
+          </p:cNvPr>
+          <p:cNvPicPr>
+            <a:picLocks noChangeAspect="1"/>
+          </p:cNvPicPr>
+          <p:nvPr/>
+        </p:nvPicPr>
+        <p:blipFill>
+          <a:blip r:embed="rId5"/>
+          <a:stretch>
+            <a:fillRect/>
+          </a:stretch>
+        </p:blipFill>
+        <p:spPr>
+          <a:xfrm>
+            <a:off x="9759818" y="3778889"/>
+            <a:ext cx="307910" cy="355116"/>
+          </a:xfrm>
+          <a:prstGeom prst="rect">
+            <a:avLst/>
+          </a:prstGeom>
+        </p:spPr>
+      </p:pic>
+      <p:pic>
+        <p:nvPicPr>
+          <p:cNvPr id="10" name="Picture 9">
+            <a:extLst>
+              <a:ext uri="{FF2B5EF4-FFF2-40B4-BE49-F238E27FC236}">
+                <a16:creationId xmlns:a16="http://schemas.microsoft.com/office/drawing/2014/main" id="{C01DB29D-104D-3EC3-4E3A-4EB0B5D1910D}"/>
+              </a:ext>
+            </a:extLst>
+          </p:cNvPr>
+          <p:cNvPicPr>
+            <a:picLocks noChangeAspect="1"/>
+          </p:cNvPicPr>
+          <p:nvPr/>
+        </p:nvPicPr>
+        <p:blipFill>
+          <a:blip r:embed="rId5"/>
+          <a:stretch>
+            <a:fillRect/>
+          </a:stretch>
+        </p:blipFill>
+        <p:spPr>
+          <a:xfrm>
+            <a:off x="5150503" y="2245248"/>
+            <a:ext cx="2155365" cy="355116"/>
           </a:xfrm>
           <a:prstGeom prst="rect">
             <a:avLst/>
